--- a/presentations/PR_L06_StringHandling_Lesson.pptx
+++ b/presentations/PR_L06_StringHandling_Lesson.pptx
@@ -2167,7 +2167,7 @@
                 <a:ea typeface="IBM Plex Sans" pitchFamily="34" charset="-122"/>
                 <a:cs typeface="IBM Plex Sans" pitchFamily="34" charset="-120"/>
               </a:rPr>
-              <a:t>Text is the data programs handle most, and Python has a tool for every part of it. At the letter press you will measure, cut, compare and search strings.</a:t>
+              <a:t>Text is the data programs handle most, and Python has a tool for every part of it. Work through the six stations and you will measure, cut, compare and search strings.</a:t>
             </a:r>
             <a:endParaRPr lang="en-US" sz="1800" dirty="0"/>
           </a:p>
@@ -2569,7 +2569,7 @@
                 <a:ea typeface="IBM Plex Sans" pitchFamily="34" charset="-122"/>
                 <a:cs typeface="IBM Plex Sans" pitchFamily="34" charset="-120"/>
               </a:rPr>
-              <a:t>Build a new string one character at a time inside a loop.</a:t>
+              <a:t>Build a new string one character at a time inside a loop over the original.</a:t>
             </a:r>
             <a:endParaRPr lang="en-US" sz="1700" dirty="0"/>
           </a:p>
@@ -2725,7 +2725,7 @@
                 <a:ea typeface="IBM Plex Sans" pitchFamily="34" charset="-122"/>
                 <a:cs typeface="IBM Plex Sans" pitchFamily="34" charset="-120"/>
               </a:rPr>
-              <a:t>Plan how you would build a reversed copy of a word.</a:t>
+              <a:t>How would you build a reversed copy of a word one character at a time?</a:t>
             </a:r>
             <a:endParaRPr lang="en-US" sz="1600" dirty="0"/>
           </a:p>
@@ -2805,7 +2805,7 @@
                 <a:ea typeface="IBM Plex Sans" pitchFamily="34" charset="-122"/>
                 <a:cs typeface="IBM Plex Sans" pitchFamily="34" charset="-120"/>
               </a:rPr>
-              <a:t>A word that reads the same backwards is a palindrome, and reversing a string is how you test for one.</a:t>
+              <a:t>A word that reads the same backwards as forwards is called a...</a:t>
             </a:r>
             <a:endParaRPr lang="en-US" sz="1600" dirty="0"/>
           </a:p>
@@ -3104,7 +3104,7 @@
                 <a:ea typeface="IBM Plex Sans" pitchFamily="34" charset="-122"/>
                 <a:cs typeface="IBM Plex Sans" pitchFamily="34" charset="-120"/>
               </a:rPr>
-              <a:t>The word on the press is LANTERN, stored in a variable called word. Tap the star and match each piece of Python to what it gives back.</a:t>
+              <a:t>A variable called word holds LANTERN. Tap the star and match each piece of Python to what it gives back.</a:t>
             </a:r>
             <a:endParaRPr lang="en-US" sz="2200" dirty="0"/>
           </a:p>
@@ -4190,7 +4190,7 @@
                 <a:ea typeface="IBM Plex Sans" pitchFamily="34" charset="-122"/>
                 <a:cs typeface="IBM Plex Sans" pitchFamily="34" charset="-120"/>
               </a:rPr>
-              <a:t>Write a program that reads a surname and prints a username made from its first three letters in lower case followed by the number of letters in the surname.</a:t>
+              <a:t>Write a program that reads a line of text and prints how many of its characters are capital letters.</a:t>
             </a:r>
             <a:endParaRPr lang="en-US" sz="1700" dirty="0"/>
           </a:p>
@@ -4320,7 +4320,7 @@
                 <a:ea typeface="IBM Plex Sans" pitchFamily="34" charset="-122"/>
                 <a:cs typeface="IBM Plex Sans" pitchFamily="34" charset="-120"/>
               </a:rPr>
-              <a:t>Write a program that reads a line of text and a single letter, and prints how many times that letter appears in the text, counting capitals and small letters as the same.</a:t>
+              <a:t>Write a program that reads a word and prints palindrome when it reads the same both ways once capitals are ignored, and not a palindrome when it does not.</a:t>
             </a:r>
             <a:endParaRPr lang="en-US" sz="1700" dirty="0"/>
           </a:p>
@@ -8093,7 +8093,7 @@
                 <a:ea typeface="IBM Plex Sans" pitchFamily="34" charset="-122"/>
                 <a:cs typeface="IBM Plex Sans" pitchFamily="34" charset="-120"/>
               </a:rPr>
-              <a:t>A negative index counts from the end, so word[-1] is always the last character.</a:t>
+              <a:t>A negative index counts from the end, so word[-1] is always the...</a:t>
             </a:r>
             <a:endParaRPr lang="en-US" sz="1600" dirty="0"/>
           </a:p>
@@ -8669,7 +8669,7 @@
                 <a:ea typeface="IBM Plex Sans" pitchFamily="34" charset="-122"/>
                 <a:cs typeface="IBM Plex Sans" pitchFamily="34" charset="-120"/>
               </a:rPr>
-              <a:t>Python's way of slicing is so useful that several other languages have copied it.</a:t>
+              <a:t>In a slice the first number is included and the second one is...</a:t>
             </a:r>
             <a:endParaRPr lang="en-US" sz="1600" dirty="0"/>
           </a:p>
@@ -9165,7 +9165,7 @@
                 <a:ea typeface="IBM Plex Sans" pitchFamily="34" charset="-122"/>
                 <a:cs typeface="IBM Plex Sans" pitchFamily="34" charset="-120"/>
               </a:rPr>
-              <a:t>Why does a program compare two names in lower case before deciding they match?</a:t>
+              <a:t>Why does a program put two words into the same case before deciding they match?</a:t>
             </a:r>
             <a:endParaRPr lang="en-US" sz="1600" dirty="0"/>
           </a:p>
@@ -9245,7 +9245,7 @@
                 <a:ea typeface="IBM Plex Sans" pitchFamily="34" charset="-122"/>
                 <a:cs typeface="IBM Plex Sans" pitchFamily="34" charset="-120"/>
               </a:rPr>
-              <a:t>Strings are compared by character code, so in Python every capital sorts before every small letter.</a:t>
+              <a:t>Strings are compared by character code, so in Python every capital sorts before every...</a:t>
             </a:r>
             <a:endParaRPr lang="en-US" sz="1600" dirty="0"/>
           </a:p>
@@ -9821,7 +9821,7 @@
                 <a:ea typeface="IBM Plex Sans" pitchFamily="34" charset="-122"/>
                 <a:cs typeface="IBM Plex Sans" pitchFamily="34" charset="-120"/>
               </a:rPr>
-              <a:t>startswith() and endswith() answer the two most common search questions on their own.</a:t>
+              <a:t>Two methods answer the commonest search questions on their own: startswith() and...</a:t>
             </a:r>
             <a:endParaRPr lang="en-US" sz="1600" dirty="0"/>
           </a:p>
@@ -10209,7 +10209,7 @@
                 <a:ea typeface="IBM Plex Sans" pitchFamily="34" charset="-122"/>
                 <a:cs typeface="IBM Plex Sans" pitchFamily="34" charset="-120"/>
               </a:rPr>
-              <a:t>Common mistake: forgetting to wrap round after z, which gives a punctuation mark instead.</a:t>
+              <a:t>Common mistake: adding 1 to the letter itself, when it is the code that has to be added to.</a:t>
             </a:r>
             <a:endParaRPr lang="en-US" sz="1700" dirty="0"/>
           </a:p>
@@ -10317,7 +10317,7 @@
                 <a:ea typeface="IBM Plex Sans" pitchFamily="34" charset="-122"/>
                 <a:cs typeface="IBM Plex Sans" pitchFamily="34" charset="-120"/>
               </a:rPr>
-              <a:t>How would you work out the letter that comes after y?</a:t>
+              <a:t>How would you work out the letter that comes after a given one?</a:t>
             </a:r>
             <a:endParaRPr lang="en-US" sz="1600" dirty="0"/>
           </a:p>
@@ -10397,7 +10397,7 @@
                 <a:ea typeface="IBM Plex Sans" pitchFamily="34" charset="-122"/>
                 <a:cs typeface="IBM Plex Sans" pitchFamily="34" charset="-120"/>
               </a:rPr>
-              <a:t>A is 65 and a is 97, so the gap between a capital and its small letter is always 32.</a:t>
+              <a:t>A is 65 and a is 97, so the gap between a capital and its small letter is always...</a:t>
             </a:r>
             <a:endParaRPr lang="en-US" sz="1600" dirty="0"/>
           </a:p>

--- a/presentations/PR_L06_StringHandling_Lesson.pptx
+++ b/presentations/PR_L06_StringHandling_Lesson.pptx
@@ -4060,7 +4060,194 @@
                 <a:ea typeface="IBM Plex Sans" pitchFamily="34" charset="-122"/>
                 <a:cs typeface="IBM Plex Sans" pitchFamily="34" charset="-120"/>
               </a:rPr>
-              <a:t>A program tries to print the last character of a word with print(word[len(word)]) and stops with an error. Explain why it fails, and write the line corrected.</a:t>
+              <a:t>A program tries to print the last character of a word with </a:t>
+            </a:r>
+            <a:pPr indent="0" marL="0">
+              <a:lnSpc>
+                <a:spcPct val="118000"/>
+              </a:lnSpc>
+              <a:buNone/>
+            </a:pPr>
+            <a:r>
+              <a:rPr lang="en-US" sz="1700" dirty="0">
+                <a:solidFill>
+                  <a:srgbClr val="1D4ED8"/>
+                </a:solidFill>
+                <a:latin typeface="IBM Plex Mono" pitchFamily="34" charset="0"/>
+                <a:ea typeface="IBM Plex Mono" pitchFamily="34" charset="-122"/>
+                <a:cs typeface="IBM Plex Mono" pitchFamily="34" charset="-120"/>
+              </a:rPr>
+              <a:t>print</a:t>
+            </a:r>
+            <a:pPr indent="0" marL="0">
+              <a:lnSpc>
+                <a:spcPct val="118000"/>
+              </a:lnSpc>
+              <a:buNone/>
+            </a:pPr>
+            <a:r>
+              <a:rPr lang="en-US" sz="1700" dirty="0">
+                <a:solidFill>
+                  <a:srgbClr val="3F3F46"/>
+                </a:solidFill>
+                <a:latin typeface="IBM Plex Mono" pitchFamily="34" charset="0"/>
+                <a:ea typeface="IBM Plex Mono" pitchFamily="34" charset="-122"/>
+                <a:cs typeface="IBM Plex Mono" pitchFamily="34" charset="-120"/>
+              </a:rPr>
+              <a:t>(</a:t>
+            </a:r>
+            <a:pPr indent="0" marL="0">
+              <a:lnSpc>
+                <a:spcPct val="118000"/>
+              </a:lnSpc>
+              <a:buNone/>
+            </a:pPr>
+            <a:r>
+              <a:rPr lang="en-US" sz="1700" dirty="0">
+                <a:solidFill>
+                  <a:srgbClr val="18181B"/>
+                </a:solidFill>
+                <a:latin typeface="IBM Plex Mono" pitchFamily="34" charset="0"/>
+                <a:ea typeface="IBM Plex Mono" pitchFamily="34" charset="-122"/>
+                <a:cs typeface="IBM Plex Mono" pitchFamily="34" charset="-120"/>
+              </a:rPr>
+              <a:t>word</a:t>
+            </a:r>
+            <a:pPr indent="0" marL="0">
+              <a:lnSpc>
+                <a:spcPct val="118000"/>
+              </a:lnSpc>
+              <a:buNone/>
+            </a:pPr>
+            <a:r>
+              <a:rPr lang="en-US" sz="1700" dirty="0">
+                <a:solidFill>
+                  <a:srgbClr val="3F3F46"/>
+                </a:solidFill>
+                <a:latin typeface="IBM Plex Mono" pitchFamily="34" charset="0"/>
+                <a:ea typeface="IBM Plex Mono" pitchFamily="34" charset="-122"/>
+                <a:cs typeface="IBM Plex Mono" pitchFamily="34" charset="-120"/>
+              </a:rPr>
+              <a:t>[</a:t>
+            </a:r>
+            <a:pPr indent="0" marL="0">
+              <a:lnSpc>
+                <a:spcPct val="118000"/>
+              </a:lnSpc>
+              <a:buNone/>
+            </a:pPr>
+            <a:r>
+              <a:rPr lang="en-US" sz="1700" dirty="0">
+                <a:solidFill>
+                  <a:srgbClr val="1D4ED8"/>
+                </a:solidFill>
+                <a:latin typeface="IBM Plex Mono" pitchFamily="34" charset="0"/>
+                <a:ea typeface="IBM Plex Mono" pitchFamily="34" charset="-122"/>
+                <a:cs typeface="IBM Plex Mono" pitchFamily="34" charset="-120"/>
+              </a:rPr>
+              <a:t>len</a:t>
+            </a:r>
+            <a:pPr indent="0" marL="0">
+              <a:lnSpc>
+                <a:spcPct val="118000"/>
+              </a:lnSpc>
+              <a:buNone/>
+            </a:pPr>
+            <a:r>
+              <a:rPr lang="en-US" sz="1700" dirty="0">
+                <a:solidFill>
+                  <a:srgbClr val="3F3F46"/>
+                </a:solidFill>
+                <a:latin typeface="IBM Plex Mono" pitchFamily="34" charset="0"/>
+                <a:ea typeface="IBM Plex Mono" pitchFamily="34" charset="-122"/>
+                <a:cs typeface="IBM Plex Mono" pitchFamily="34" charset="-120"/>
+              </a:rPr>
+              <a:t>(</a:t>
+            </a:r>
+            <a:pPr indent="0" marL="0">
+              <a:lnSpc>
+                <a:spcPct val="118000"/>
+              </a:lnSpc>
+              <a:buNone/>
+            </a:pPr>
+            <a:r>
+              <a:rPr lang="en-US" sz="1700" dirty="0">
+                <a:solidFill>
+                  <a:srgbClr val="18181B"/>
+                </a:solidFill>
+                <a:latin typeface="IBM Plex Mono" pitchFamily="34" charset="0"/>
+                <a:ea typeface="IBM Plex Mono" pitchFamily="34" charset="-122"/>
+                <a:cs typeface="IBM Plex Mono" pitchFamily="34" charset="-120"/>
+              </a:rPr>
+              <a:t>word</a:t>
+            </a:r>
+            <a:pPr indent="0" marL="0">
+              <a:lnSpc>
+                <a:spcPct val="118000"/>
+              </a:lnSpc>
+              <a:buNone/>
+            </a:pPr>
+            <a:r>
+              <a:rPr lang="en-US" sz="1700" dirty="0">
+                <a:solidFill>
+                  <a:srgbClr val="3F3F46"/>
+                </a:solidFill>
+                <a:latin typeface="IBM Plex Mono" pitchFamily="34" charset="0"/>
+                <a:ea typeface="IBM Plex Mono" pitchFamily="34" charset="-122"/>
+                <a:cs typeface="IBM Plex Mono" pitchFamily="34" charset="-120"/>
+              </a:rPr>
+              <a:t>)</a:t>
+            </a:r>
+            <a:pPr indent="0" marL="0">
+              <a:lnSpc>
+                <a:spcPct val="118000"/>
+              </a:lnSpc>
+              <a:buNone/>
+            </a:pPr>
+            <a:r>
+              <a:rPr lang="en-US" sz="1700" dirty="0">
+                <a:solidFill>
+                  <a:srgbClr val="3F3F46"/>
+                </a:solidFill>
+                <a:latin typeface="IBM Plex Mono" pitchFamily="34" charset="0"/>
+                <a:ea typeface="IBM Plex Mono" pitchFamily="34" charset="-122"/>
+                <a:cs typeface="IBM Plex Mono" pitchFamily="34" charset="-120"/>
+              </a:rPr>
+              <a:t>]</a:t>
+            </a:r>
+            <a:pPr indent="0" marL="0">
+              <a:lnSpc>
+                <a:spcPct val="118000"/>
+              </a:lnSpc>
+              <a:buNone/>
+            </a:pPr>
+            <a:r>
+              <a:rPr lang="en-US" sz="1700" dirty="0">
+                <a:solidFill>
+                  <a:srgbClr val="3F3F46"/>
+                </a:solidFill>
+                <a:latin typeface="IBM Plex Mono" pitchFamily="34" charset="0"/>
+                <a:ea typeface="IBM Plex Mono" pitchFamily="34" charset="-122"/>
+                <a:cs typeface="IBM Plex Mono" pitchFamily="34" charset="-120"/>
+              </a:rPr>
+              <a:t>)</a:t>
+            </a:r>
+            <a:pPr indent="0" marL="0">
+              <a:lnSpc>
+                <a:spcPct val="118000"/>
+              </a:lnSpc>
+              <a:buNone/>
+            </a:pPr>
+            <a:r>
+              <a:rPr lang="en-US" sz="1700" dirty="0">
+                <a:solidFill>
+                  <a:srgbClr val="101828"/>
+                </a:solidFill>
+                <a:latin typeface="IBM Plex Sans" pitchFamily="34" charset="0"/>
+                <a:ea typeface="IBM Plex Sans" pitchFamily="34" charset="-122"/>
+                <a:cs typeface="IBM Plex Sans" pitchFamily="34" charset="-120"/>
+              </a:rPr>
+              <a:t> and stops with an error. Explain why it fails, and write the line corrected.</a:t>
             </a:r>
             <a:endParaRPr lang="en-US" sz="1700" dirty="0"/>
           </a:p>

--- a/presentations/PR_L06_StringHandling_Lesson.pptx
+++ b/presentations/PR_L06_StringHandling_Lesson.pptx
@@ -19,9 +19,10 @@
     <p:sldId id="267" r:id="rId13"/>
     <p:sldId id="268" r:id="rId14"/>
     <p:sldId id="269" r:id="rId15"/>
+    <p:sldId id="270" r:id="rId16"/>
   </p:sldIdLst>
   <p:notesMasterIdLst>
-    <p:notesMasterId r:id="rId16"/>
+    <p:notesMasterId r:id="rId17"/>
   </p:notesMasterIdLst>
   <p:sldSz cx="12192000" cy="6858000"/>
   <p:notesSz cx="6858000" cy="12192000"/>
@@ -692,7 +693,14 @@
           <a:p>
             <a:r>
               <a:rPr lang="en-US" dirty="0"/>
-              <a:t>Make them commit to an answer on paper before they tap the star. Guessing first costs them the learning.</a:t>
+              <a:t>The answer is B: 4
+-1.
+Do not say it yet. Every pupil commits first - fingers, whiteboards or a show of hands on each letter in turn - and you count the split before anyone can change their mind.
+IF MOST OF THE CLASS IS RIGHT: say why it is right in one sentence and go straight on to the independent work.
+IF A SIGNIFICANT GROUP IS ON ONE WRONG LETTER: that option is the misconception to teach against before anyone goes on. Go back to station 4, Searching inside text, and work through its example again, aloud, with the class watching, then re-ask this question.
+The course's own response to a wrong answer here: wet and the space fill positions 0 to 3, so paint starts at 4. A word that is not there gives -1.
+A limitation, stated rather than papered over: one response covers every wrong option; it does not say what to revisit for each one. The course does not record what each separate wrong option means, and this slide does not invent it. Decide your own reteach for each option before the lesson; the options above are the start of it.
+This is a real activity from the experience (pr-l06-s4-c2), so the wording here is the wording a pupil will see.</a:t>
             </a:r>
             <a:endParaRPr lang="en-US" dirty="0"/>
           </a:p>
@@ -780,7 +788,7 @@
           <a:p>
             <a:r>
               <a:rPr lang="en-US" dirty="0"/>
-              <a:t>Use these as a settler, or as something for early finishers to read in the experience.</a:t>
+              <a:t>Make them commit to an answer on paper before they tap the star. Guessing first costs them the learning.</a:t>
             </a:r>
             <a:endParaRPr lang="en-US" dirty="0"/>
           </a:p>
@@ -868,7 +876,7 @@
           <a:p>
             <a:r>
               <a:rPr lang="en-US" dirty="0"/>
-              <a:t>Timed and silent. Mark against the answer sheet, then ask students to record their weakest area.</a:t>
+              <a:t>Use these as a settler, or as something for early finishers to read in the experience.</a:t>
             </a:r>
             <a:endParaRPr lang="en-US" dirty="0"/>
           </a:p>
@@ -956,7 +964,7 @@
           <a:p>
             <a:r>
               <a:rPr lang="en-US" dirty="0"/>
-              <a:t>Students copy their score-screen breakdown onto the worksheet, then rate themselves here.</a:t>
+              <a:t>Timed and silent. Mark against the answer sheet, then ask students to record their weakest area.</a:t>
             </a:r>
             <a:endParaRPr lang="en-US" dirty="0"/>
           </a:p>
@@ -980,6 +988,94 @@
             <a:fld id="{F7021451-1387-4CA6-816F-3879F97B5CBC}" type="slidenum">
               <a:rPr lang="en-US"/>
               <a:t>14</a:t>
+            </a:fld>
+            <a:endParaRPr lang="en-US"/>
+          </a:p>
+        </p:txBody>
+      </p:sp>
+    </p:spTree>
+    <p:extLst>
+      <p:ext uri="{BB962C8B-B14F-4D97-AF65-F5344CB8AC3E}">
+        <p14:creationId xmlns:p14="http://schemas.microsoft.com/office/powerpoint/2010/main" val="1024086991"/>
+      </p:ext>
+    </p:extLst>
+  </p:cSld>
+  <p:clrMapOvr>
+    <a:masterClrMapping/>
+  </p:clrMapOvr>
+</p:notes>
+</file>
+
+<file path=ppt/notesSlides/notesSlide15.xml><?xml version="1.0" encoding="utf-8"?>
+<p:notes xmlns:a="http://schemas.openxmlformats.org/drawingml/2006/main" xmlns:r="http://schemas.openxmlformats.org/officeDocument/2006/relationships" xmlns:p="http://schemas.openxmlformats.org/presentationml/2006/main">
+  <p:cSld>
+    <p:spTree>
+      <p:nvGrpSpPr>
+        <p:cNvPr id="1" name=""/>
+        <p:cNvGrpSpPr/>
+        <p:nvPr/>
+      </p:nvGrpSpPr>
+      <p:grpSpPr>
+        <a:xfrm>
+          <a:off x="0" y="0"/>
+          <a:ext cx="0" cy="0"/>
+          <a:chOff x="0" y="0"/>
+          <a:chExt cx="0" cy="0"/>
+        </a:xfrm>
+      </p:grpSpPr>
+      <p:sp>
+        <p:nvSpPr>
+          <p:cNvPr id="2" name="Slide Image Placeholder 1"/>
+          <p:cNvSpPr>
+            <a:spLocks noGrp="1" noRot="1" noChangeAspect="1"/>
+          </p:cNvSpPr>
+          <p:nvPr>
+            <p:ph type="sldImg"/>
+          </p:nvPr>
+        </p:nvSpPr>
+        <p:spPr/>
+      </p:sp>
+      <p:sp>
+        <p:nvSpPr>
+          <p:cNvPr id="3" name="Notes Placeholder 2"/>
+          <p:cNvSpPr>
+            <a:spLocks noGrp="1"/>
+          </p:cNvSpPr>
+          <p:nvPr>
+            <p:ph type="body" idx="1"/>
+          </p:nvPr>
+        </p:nvSpPr>
+        <p:spPr/>
+        <p:txBody>
+          <a:bodyPr/>
+          <a:lstStyle/>
+          <a:p>
+            <a:r>
+              <a:rPr lang="en-US" dirty="0"/>
+              <a:t>Students copy their score-screen breakdown onto the worksheet, then rate themselves here.</a:t>
+            </a:r>
+            <a:endParaRPr lang="en-US" dirty="0"/>
+          </a:p>
+        </p:txBody>
+      </p:sp>
+      <p:sp>
+        <p:nvSpPr>
+          <p:cNvPr id="4" name="Slide Number Placeholder 3"/>
+          <p:cNvSpPr>
+            <a:spLocks noGrp="1"/>
+          </p:cNvSpPr>
+          <p:nvPr>
+            <p:ph type="sldNum" sz="quarter" idx="10"/>
+          </p:nvPr>
+        </p:nvSpPr>
+        <p:spPr/>
+        <p:txBody>
+          <a:bodyPr/>
+          <a:lstStyle/>
+          <a:p>
+            <a:fld id="{F7021451-1387-4CA6-816F-3879F97B5CBC}" type="slidenum">
+              <a:rPr lang="en-US"/>
+              <a:t>15</a:t>
             </a:fld>
             <a:endParaRPr lang="en-US"/>
           </a:p>
@@ -2949,12 +3045,12 @@
         </p:nvSpPr>
         <p:spPr>
           <a:xfrm>
-            <a:off x="502920" y="438912"/>
-            <a:ext cx="3108960" cy="502920"/>
+            <a:off x="502920" y="457200"/>
+            <a:ext cx="1051560" cy="420624"/>
           </a:xfrm>
           <a:prstGeom prst="roundRect">
             <a:avLst>
-              <a:gd name="adj" fmla="val 18182"/>
+              <a:gd name="adj" fmla="val 21739"/>
             </a:avLst>
           </a:prstGeom>
           <a:solidFill>
@@ -2971,8 +3067,8 @@
         </p:nvSpPr>
         <p:spPr>
           <a:xfrm>
-            <a:off x="502920" y="438912"/>
-            <a:ext cx="3108960" cy="502920"/>
+            <a:off x="502920" y="457200"/>
+            <a:ext cx="1051560" cy="420624"/>
           </a:xfrm>
           <a:prstGeom prst="rect">
             <a:avLst/>
@@ -2988,7 +3084,7 @@
               <a:buNone/>
             </a:pPr>
             <a:r>
-              <a:rPr lang="en-US" sz="1300" b="1" dirty="0">
+              <a:rPr lang="en-US" sz="1200" b="1" dirty="0">
                 <a:solidFill>
                   <a:srgbClr val="101828"/>
                 </a:solidFill>
@@ -2996,9 +3092,9 @@
                 <a:ea typeface="IBM Plex Mono" pitchFamily="34" charset="-122"/>
                 <a:cs typeface="IBM Plex Mono" pitchFamily="34" charset="-120"/>
               </a:rPr>
-              <a:t>★  FINAL CHALLENGE</a:t>
-            </a:r>
-            <a:endParaRPr lang="en-US" sz="1300" dirty="0"/>
+              <a:t>CHECK</a:t>
+            </a:r>
+            <a:endParaRPr lang="en-US" sz="1200" dirty="0"/>
           </a:p>
         </p:txBody>
       </p:sp>
@@ -3010,8 +3106,8 @@
         </p:nvSpPr>
         <p:spPr>
           <a:xfrm>
-            <a:off x="502920" y="1097280"/>
-            <a:ext cx="11155680" cy="731520"/>
+            <a:off x="1737360" y="457200"/>
+            <a:ext cx="9875520" cy="420624"/>
           </a:xfrm>
           <a:prstGeom prst="rect">
             <a:avLst/>
@@ -3027,34 +3123,76 @@
               <a:buNone/>
             </a:pPr>
             <a:r>
-              <a:rPr lang="en-US" sz="3400" b="1" dirty="0">
-                <a:solidFill>
-                  <a:srgbClr val="101828"/>
+              <a:rPr lang="en-US" sz="1500" dirty="0">
+                <a:solidFill>
+                  <a:srgbClr val="667085"/>
                 </a:solidFill>
                 <a:latin typeface="IBM Plex Sans" pitchFamily="34" charset="0"/>
                 <a:ea typeface="IBM Plex Sans" pitchFamily="34" charset="-122"/>
                 <a:cs typeface="IBM Plex Sans" pitchFamily="34" charset="-120"/>
               </a:rPr>
-              <a:t>What does it give?</a:t>
-            </a:r>
-            <a:endParaRPr lang="en-US" sz="3400" dirty="0"/>
-          </a:p>
-        </p:txBody>
-      </p:sp>
-      <p:sp>
-        <p:nvSpPr>
-          <p:cNvPr id="8" name="Shape 6"/>
+              <a:t>Hands down. Everyone commits.</a:t>
+            </a:r>
+            <a:endParaRPr lang="en-US" sz="1500" dirty="0"/>
+          </a:p>
+        </p:txBody>
+      </p:sp>
+      <p:sp>
+        <p:nvSpPr>
+          <p:cNvPr id="8" name="Text 6"/>
+          <p:cNvSpPr txBox="1"/>
+          <p:nvPr/>
+        </p:nvSpPr>
+        <p:spPr>
+          <a:xfrm>
+            <a:off x="502920" y="1097280"/>
+            <a:ext cx="11155680" cy="914400"/>
+          </a:xfrm>
+          <a:prstGeom prst="rect">
+            <a:avLst/>
+          </a:prstGeom>
+          <a:noFill/>
+          <a:ln/>
+        </p:spPr>
+        <p:txBody>
+          <a:bodyPr wrap="square" lIns="0" tIns="0" rIns="0" bIns="0" rtlCol="0" anchor="ctr"/>
+          <a:lstStyle/>
+          <a:p>
+            <a:pPr indent="0" marL="0">
+              <a:lnSpc>
+                <a:spcPct val="115000"/>
+              </a:lnSpc>
+              <a:buNone/>
+            </a:pPr>
+            <a:r>
+              <a:rPr lang="en-US" sz="2600" b="1" dirty="0">
+                <a:solidFill>
+                  <a:srgbClr val="101828"/>
+                </a:solidFill>
+                <a:latin typeface="IBM Plex Sans" pitchFamily="34" charset="0"/>
+                <a:ea typeface="IBM Plex Sans" pitchFamily="34" charset="-122"/>
+                <a:cs typeface="IBM Plex Sans" pitchFamily="34" charset="-120"/>
+              </a:rPr>
+              <a:t>What will this program display?</a:t>
+            </a:r>
+            <a:endParaRPr lang="en-US" sz="2600" dirty="0"/>
+          </a:p>
+        </p:txBody>
+      </p:sp>
+      <p:sp>
+        <p:nvSpPr>
+          <p:cNvPr id="9" name="Shape 7"/>
           <p:cNvSpPr/>
           <p:nvPr/>
         </p:nvSpPr>
         <p:spPr>
           <a:xfrm>
-            <a:off x="502920" y="2011680"/>
-            <a:ext cx="11155680" cy="2194560"/>
+            <a:off x="502920" y="2148840"/>
+            <a:ext cx="5029200" cy="1280160"/>
           </a:xfrm>
           <a:prstGeom prst="roundRect">
             <a:avLst>
-              <a:gd name="adj" fmla="val 5000"/>
+              <a:gd name="adj" fmla="val 8571"/>
             </a:avLst>
           </a:prstGeom>
           <a:solidFill>
@@ -3062,7 +3200,7 @@
           </a:solidFill>
           <a:ln w="15875">
             <a:solidFill>
-              <a:srgbClr val="2D63FF"/>
+              <a:srgbClr val="D9DEE7"/>
             </a:solidFill>
             <a:prstDash val="solid"/>
           </a:ln>
@@ -3070,33 +3208,203 @@
       </p:sp>
       <p:sp>
         <p:nvSpPr>
-          <p:cNvPr id="9" name="Text 7"/>
-          <p:cNvSpPr txBox="1"/>
-          <p:nvPr/>
-        </p:nvSpPr>
-        <p:spPr>
-          <a:xfrm>
-            <a:off x="1005840" y="2331720"/>
-            <a:ext cx="10149840" cy="1554480"/>
-          </a:xfrm>
-          <a:prstGeom prst="rect">
-            <a:avLst/>
-          </a:prstGeom>
-          <a:noFill/>
-          <a:ln/>
-        </p:spPr>
-        <p:txBody>
-          <a:bodyPr wrap="square" lIns="0" tIns="0" rIns="0" bIns="0" rtlCol="0" anchor="ctr"/>
+          <p:cNvPr id="10" name="Text 8"/>
+          <p:cNvSpPr txBox="1"/>
+          <p:nvPr/>
+        </p:nvSpPr>
+        <p:spPr>
+          <a:xfrm>
+            <a:off x="822960" y="2350008"/>
+            <a:ext cx="4480560" cy="877824"/>
+          </a:xfrm>
+          <a:prstGeom prst="rect">
+            <a:avLst/>
+          </a:prstGeom>
+          <a:noFill/>
+          <a:ln/>
+        </p:spPr>
+        <p:txBody>
+          <a:bodyPr wrap="square" lIns="0" tIns="0" rIns="0" bIns="0" rtlCol="0" anchor="t"/>
           <a:lstStyle/>
           <a:p>
             <a:pPr indent="0" marL="0">
               <a:lnSpc>
-                <a:spcPct val="130000"/>
+                <a:spcPct val="125000"/>
               </a:lnSpc>
               <a:buNone/>
             </a:pPr>
             <a:r>
-              <a:rPr lang="en-US" sz="2200" dirty="0">
+              <a:rPr lang="en-US" sz="1500" dirty="0">
+                <a:solidFill>
+                  <a:srgbClr val="101828"/>
+                </a:solidFill>
+                <a:latin typeface="IBM Plex Mono" pitchFamily="34" charset="0"/>
+                <a:ea typeface="IBM Plex Mono" pitchFamily="34" charset="-122"/>
+                <a:cs typeface="IBM Plex Mono" pitchFamily="34" charset="-120"/>
+              </a:rPr>
+              <a:t>t = "wet paint"</a:t>
+            </a:r>
+            <a:endParaRPr lang="en-US" sz="1500" dirty="0"/>
+          </a:p>
+          <a:p>
+            <a:pPr indent="0" marL="0">
+              <a:lnSpc>
+                <a:spcPct val="125000"/>
+              </a:lnSpc>
+              <a:buNone/>
+            </a:pPr>
+            <a:r>
+              <a:rPr lang="en-US" sz="1500" dirty="0">
+                <a:solidFill>
+                  <a:srgbClr val="101828"/>
+                </a:solidFill>
+                <a:latin typeface="IBM Plex Mono" pitchFamily="34" charset="0"/>
+                <a:ea typeface="IBM Plex Mono" pitchFamily="34" charset="-122"/>
+                <a:cs typeface="IBM Plex Mono" pitchFamily="34" charset="-120"/>
+              </a:rPr>
+              <a:t>print(t.find("paint"))</a:t>
+            </a:r>
+            <a:endParaRPr lang="en-US" sz="1500" dirty="0"/>
+          </a:p>
+          <a:p>
+            <a:pPr indent="0" marL="0">
+              <a:lnSpc>
+                <a:spcPct val="125000"/>
+              </a:lnSpc>
+              <a:buNone/>
+            </a:pPr>
+            <a:r>
+              <a:rPr lang="en-US" sz="1500" dirty="0">
+                <a:solidFill>
+                  <a:srgbClr val="101828"/>
+                </a:solidFill>
+                <a:latin typeface="IBM Plex Mono" pitchFamily="34" charset="0"/>
+                <a:ea typeface="IBM Plex Mono" pitchFamily="34" charset="-122"/>
+                <a:cs typeface="IBM Plex Mono" pitchFamily="34" charset="-120"/>
+              </a:rPr>
+              <a:t>print(t.find("dry"))</a:t>
+            </a:r>
+            <a:endParaRPr lang="en-US" sz="1500" dirty="0"/>
+          </a:p>
+        </p:txBody>
+      </p:sp>
+      <p:sp>
+        <p:nvSpPr>
+          <p:cNvPr id="11" name="Shape 9"/>
+          <p:cNvSpPr/>
+          <p:nvPr/>
+        </p:nvSpPr>
+        <p:spPr>
+          <a:xfrm>
+            <a:off x="5806440" y="2148840"/>
+            <a:ext cx="5852160" cy="731520"/>
+          </a:xfrm>
+          <a:prstGeom prst="roundRect">
+            <a:avLst>
+              <a:gd name="adj" fmla="val 15000"/>
+            </a:avLst>
+          </a:prstGeom>
+          <a:solidFill>
+            <a:srgbClr val="FFFFFF"/>
+          </a:solidFill>
+          <a:ln w="15875">
+            <a:solidFill>
+              <a:srgbClr val="D9DEE7"/>
+            </a:solidFill>
+            <a:prstDash val="solid"/>
+          </a:ln>
+        </p:spPr>
+      </p:sp>
+      <p:sp>
+        <p:nvSpPr>
+          <p:cNvPr id="12" name="Shape 10"/>
+          <p:cNvSpPr/>
+          <p:nvPr/>
+        </p:nvSpPr>
+        <p:spPr>
+          <a:xfrm>
+            <a:off x="6080760" y="2295144"/>
+            <a:ext cx="438912" cy="438912"/>
+          </a:xfrm>
+          <a:prstGeom prst="roundRect">
+            <a:avLst>
+              <a:gd name="adj" fmla="val 20833"/>
+            </a:avLst>
+          </a:prstGeom>
+          <a:solidFill>
+            <a:srgbClr val="EEF2FB"/>
+          </a:solidFill>
+          <a:ln/>
+        </p:spPr>
+      </p:sp>
+      <p:sp>
+        <p:nvSpPr>
+          <p:cNvPr id="13" name="Text 11"/>
+          <p:cNvSpPr txBox="1"/>
+          <p:nvPr/>
+        </p:nvSpPr>
+        <p:spPr>
+          <a:xfrm>
+            <a:off x="6080760" y="2295144"/>
+            <a:ext cx="438912" cy="438912"/>
+          </a:xfrm>
+          <a:prstGeom prst="rect">
+            <a:avLst/>
+          </a:prstGeom>
+          <a:noFill/>
+          <a:ln/>
+        </p:spPr>
+        <p:txBody>
+          <a:bodyPr wrap="square" lIns="0" tIns="0" rIns="0" bIns="0" rtlCol="0" anchor="ctr"/>
+          <a:lstStyle/>
+          <a:p>
+            <a:pPr algn="ctr" indent="0" marL="0">
+              <a:buNone/>
+            </a:pPr>
+            <a:r>
+              <a:rPr lang="en-US" sz="1300" b="1" dirty="0">
+                <a:solidFill>
+                  <a:srgbClr val="2D63FF"/>
+                </a:solidFill>
+                <a:latin typeface="IBM Plex Mono" pitchFamily="34" charset="0"/>
+                <a:ea typeface="IBM Plex Mono" pitchFamily="34" charset="-122"/>
+                <a:cs typeface="IBM Plex Mono" pitchFamily="34" charset="-120"/>
+              </a:rPr>
+              <a:t>A</a:t>
+            </a:r>
+            <a:endParaRPr lang="en-US" sz="1300" dirty="0"/>
+          </a:p>
+        </p:txBody>
+      </p:sp>
+      <p:sp>
+        <p:nvSpPr>
+          <p:cNvPr id="14" name="Text 12"/>
+          <p:cNvSpPr txBox="1"/>
+          <p:nvPr/>
+        </p:nvSpPr>
+        <p:spPr>
+          <a:xfrm>
+            <a:off x="6720840" y="2148840"/>
+            <a:ext cx="4754880" cy="731520"/>
+          </a:xfrm>
+          <a:prstGeom prst="rect">
+            <a:avLst/>
+          </a:prstGeom>
+          <a:noFill/>
+          <a:ln/>
+        </p:spPr>
+        <p:txBody>
+          <a:bodyPr wrap="square" lIns="0" tIns="0" rIns="0" bIns="0" rtlCol="0" anchor="ctr"/>
+          <a:lstStyle/>
+          <a:p>
+            <a:pPr indent="0" marL="0">
+              <a:lnSpc>
+                <a:spcPct val="115000"/>
+              </a:lnSpc>
+              <a:buNone/>
+            </a:pPr>
+            <a:r>
+              <a:rPr lang="en-US" sz="1700" dirty="0">
                 <a:solidFill>
                   <a:srgbClr val="101828"/>
                 </a:solidFill>
@@ -3104,48 +3412,329 @@
                 <a:ea typeface="IBM Plex Sans" pitchFamily="34" charset="-122"/>
                 <a:cs typeface="IBM Plex Sans" pitchFamily="34" charset="-120"/>
               </a:rPr>
-              <a:t>A variable called word holds LANTERN. Tap the star and match each piece of Python to what it gives back.</a:t>
-            </a:r>
-            <a:endParaRPr lang="en-US" sz="2200" dirty="0"/>
-          </a:p>
-        </p:txBody>
-      </p:sp>
-      <p:sp>
-        <p:nvSpPr>
-          <p:cNvPr id="10" name="Text 8"/>
-          <p:cNvSpPr txBox="1"/>
-          <p:nvPr/>
-        </p:nvSpPr>
-        <p:spPr>
-          <a:xfrm>
-            <a:off x="502920" y="4526280"/>
-            <a:ext cx="11155680" cy="457200"/>
-          </a:xfrm>
-          <a:prstGeom prst="rect">
-            <a:avLst/>
-          </a:prstGeom>
-          <a:noFill/>
-          <a:ln/>
-        </p:spPr>
-        <p:txBody>
-          <a:bodyPr wrap="square" lIns="0" tIns="0" rIns="0" bIns="0" rtlCol="0" anchor="ctr"/>
-          <a:lstStyle/>
+              <a:t>4</a:t>
+            </a:r>
+            <a:endParaRPr lang="en-US" sz="1700" dirty="0"/>
+          </a:p>
           <a:p>
             <a:pPr indent="0" marL="0">
-              <a:buNone/>
-            </a:pPr>
-            <a:r>
-              <a:rPr lang="en-US" sz="1600" dirty="0">
-                <a:solidFill>
-                  <a:srgbClr val="667085"/>
+              <a:lnSpc>
+                <a:spcPct val="115000"/>
+              </a:lnSpc>
+              <a:buNone/>
+            </a:pPr>
+            <a:r>
+              <a:rPr lang="en-US" sz="1700" dirty="0">
+                <a:solidFill>
+                  <a:srgbClr val="101828"/>
                 </a:solidFill>
                 <a:latin typeface="IBM Plex Sans" pitchFamily="34" charset="0"/>
                 <a:ea typeface="IBM Plex Sans" pitchFamily="34" charset="-122"/>
                 <a:cs typeface="IBM Plex Sans" pitchFamily="34" charset="-120"/>
               </a:rPr>
-              <a:t>Predict on paper first, then look down and test it.</a:t>
-            </a:r>
-            <a:endParaRPr lang="en-US" sz="1600" dirty="0"/>
+              <a:t>0</a:t>
+            </a:r>
+            <a:endParaRPr lang="en-US" sz="1700" dirty="0"/>
+          </a:p>
+        </p:txBody>
+      </p:sp>
+      <p:sp>
+        <p:nvSpPr>
+          <p:cNvPr id="15" name="Shape 13"/>
+          <p:cNvSpPr/>
+          <p:nvPr/>
+        </p:nvSpPr>
+        <p:spPr>
+          <a:xfrm>
+            <a:off x="5806440" y="3017520"/>
+            <a:ext cx="5852160" cy="731520"/>
+          </a:xfrm>
+          <a:prstGeom prst="roundRect">
+            <a:avLst>
+              <a:gd name="adj" fmla="val 15000"/>
+            </a:avLst>
+          </a:prstGeom>
+          <a:solidFill>
+            <a:srgbClr val="FFFFFF"/>
+          </a:solidFill>
+          <a:ln w="15875">
+            <a:solidFill>
+              <a:srgbClr val="D9DEE7"/>
+            </a:solidFill>
+            <a:prstDash val="solid"/>
+          </a:ln>
+        </p:spPr>
+      </p:sp>
+      <p:sp>
+        <p:nvSpPr>
+          <p:cNvPr id="16" name="Shape 14"/>
+          <p:cNvSpPr/>
+          <p:nvPr/>
+        </p:nvSpPr>
+        <p:spPr>
+          <a:xfrm>
+            <a:off x="6080760" y="3163824"/>
+            <a:ext cx="438912" cy="438912"/>
+          </a:xfrm>
+          <a:prstGeom prst="roundRect">
+            <a:avLst>
+              <a:gd name="adj" fmla="val 20833"/>
+            </a:avLst>
+          </a:prstGeom>
+          <a:solidFill>
+            <a:srgbClr val="EEF2FB"/>
+          </a:solidFill>
+          <a:ln/>
+        </p:spPr>
+      </p:sp>
+      <p:sp>
+        <p:nvSpPr>
+          <p:cNvPr id="17" name="Text 15"/>
+          <p:cNvSpPr txBox="1"/>
+          <p:nvPr/>
+        </p:nvSpPr>
+        <p:spPr>
+          <a:xfrm>
+            <a:off x="6080760" y="3163824"/>
+            <a:ext cx="438912" cy="438912"/>
+          </a:xfrm>
+          <a:prstGeom prst="rect">
+            <a:avLst/>
+          </a:prstGeom>
+          <a:noFill/>
+          <a:ln/>
+        </p:spPr>
+        <p:txBody>
+          <a:bodyPr wrap="square" lIns="0" tIns="0" rIns="0" bIns="0" rtlCol="0" anchor="ctr"/>
+          <a:lstStyle/>
+          <a:p>
+            <a:pPr algn="ctr" indent="0" marL="0">
+              <a:buNone/>
+            </a:pPr>
+            <a:r>
+              <a:rPr lang="en-US" sz="1300" b="1" dirty="0">
+                <a:solidFill>
+                  <a:srgbClr val="2D63FF"/>
+                </a:solidFill>
+                <a:latin typeface="IBM Plex Mono" pitchFamily="34" charset="0"/>
+                <a:ea typeface="IBM Plex Mono" pitchFamily="34" charset="-122"/>
+                <a:cs typeface="IBM Plex Mono" pitchFamily="34" charset="-120"/>
+              </a:rPr>
+              <a:t>B</a:t>
+            </a:r>
+            <a:endParaRPr lang="en-US" sz="1300" dirty="0"/>
+          </a:p>
+        </p:txBody>
+      </p:sp>
+      <p:sp>
+        <p:nvSpPr>
+          <p:cNvPr id="18" name="Text 16"/>
+          <p:cNvSpPr txBox="1"/>
+          <p:nvPr/>
+        </p:nvSpPr>
+        <p:spPr>
+          <a:xfrm>
+            <a:off x="6720840" y="3017520"/>
+            <a:ext cx="4754880" cy="731520"/>
+          </a:xfrm>
+          <a:prstGeom prst="rect">
+            <a:avLst/>
+          </a:prstGeom>
+          <a:noFill/>
+          <a:ln/>
+        </p:spPr>
+        <p:txBody>
+          <a:bodyPr wrap="square" lIns="0" tIns="0" rIns="0" bIns="0" rtlCol="0" anchor="ctr"/>
+          <a:lstStyle/>
+          <a:p>
+            <a:pPr indent="0" marL="0">
+              <a:lnSpc>
+                <a:spcPct val="115000"/>
+              </a:lnSpc>
+              <a:buNone/>
+            </a:pPr>
+            <a:r>
+              <a:rPr lang="en-US" sz="1700" dirty="0">
+                <a:solidFill>
+                  <a:srgbClr val="101828"/>
+                </a:solidFill>
+                <a:latin typeface="IBM Plex Sans" pitchFamily="34" charset="0"/>
+                <a:ea typeface="IBM Plex Sans" pitchFamily="34" charset="-122"/>
+                <a:cs typeface="IBM Plex Sans" pitchFamily="34" charset="-120"/>
+              </a:rPr>
+              <a:t>4</a:t>
+            </a:r>
+            <a:endParaRPr lang="en-US" sz="1700" dirty="0"/>
+          </a:p>
+          <a:p>
+            <a:pPr indent="0" marL="0">
+              <a:lnSpc>
+                <a:spcPct val="115000"/>
+              </a:lnSpc>
+              <a:buNone/>
+            </a:pPr>
+            <a:r>
+              <a:rPr lang="en-US" sz="1700" dirty="0">
+                <a:solidFill>
+                  <a:srgbClr val="101828"/>
+                </a:solidFill>
+                <a:latin typeface="IBM Plex Sans" pitchFamily="34" charset="0"/>
+                <a:ea typeface="IBM Plex Sans" pitchFamily="34" charset="-122"/>
+                <a:cs typeface="IBM Plex Sans" pitchFamily="34" charset="-120"/>
+              </a:rPr>
+              <a:t>-1</a:t>
+            </a:r>
+            <a:endParaRPr lang="en-US" sz="1700" dirty="0"/>
+          </a:p>
+        </p:txBody>
+      </p:sp>
+      <p:sp>
+        <p:nvSpPr>
+          <p:cNvPr id="19" name="Shape 17"/>
+          <p:cNvSpPr/>
+          <p:nvPr/>
+        </p:nvSpPr>
+        <p:spPr>
+          <a:xfrm>
+            <a:off x="5806440" y="3886200"/>
+            <a:ext cx="5852160" cy="731520"/>
+          </a:xfrm>
+          <a:prstGeom prst="roundRect">
+            <a:avLst>
+              <a:gd name="adj" fmla="val 15000"/>
+            </a:avLst>
+          </a:prstGeom>
+          <a:solidFill>
+            <a:srgbClr val="FFFFFF"/>
+          </a:solidFill>
+          <a:ln w="15875">
+            <a:solidFill>
+              <a:srgbClr val="D9DEE7"/>
+            </a:solidFill>
+            <a:prstDash val="solid"/>
+          </a:ln>
+        </p:spPr>
+      </p:sp>
+      <p:sp>
+        <p:nvSpPr>
+          <p:cNvPr id="20" name="Shape 18"/>
+          <p:cNvSpPr/>
+          <p:nvPr/>
+        </p:nvSpPr>
+        <p:spPr>
+          <a:xfrm>
+            <a:off x="6080760" y="4032504"/>
+            <a:ext cx="438912" cy="438912"/>
+          </a:xfrm>
+          <a:prstGeom prst="roundRect">
+            <a:avLst>
+              <a:gd name="adj" fmla="val 20833"/>
+            </a:avLst>
+          </a:prstGeom>
+          <a:solidFill>
+            <a:srgbClr val="EEF2FB"/>
+          </a:solidFill>
+          <a:ln/>
+        </p:spPr>
+      </p:sp>
+      <p:sp>
+        <p:nvSpPr>
+          <p:cNvPr id="21" name="Text 19"/>
+          <p:cNvSpPr txBox="1"/>
+          <p:nvPr/>
+        </p:nvSpPr>
+        <p:spPr>
+          <a:xfrm>
+            <a:off x="6080760" y="4032504"/>
+            <a:ext cx="438912" cy="438912"/>
+          </a:xfrm>
+          <a:prstGeom prst="rect">
+            <a:avLst/>
+          </a:prstGeom>
+          <a:noFill/>
+          <a:ln/>
+        </p:spPr>
+        <p:txBody>
+          <a:bodyPr wrap="square" lIns="0" tIns="0" rIns="0" bIns="0" rtlCol="0" anchor="ctr"/>
+          <a:lstStyle/>
+          <a:p>
+            <a:pPr algn="ctr" indent="0" marL="0">
+              <a:buNone/>
+            </a:pPr>
+            <a:r>
+              <a:rPr lang="en-US" sz="1300" b="1" dirty="0">
+                <a:solidFill>
+                  <a:srgbClr val="2D63FF"/>
+                </a:solidFill>
+                <a:latin typeface="IBM Plex Mono" pitchFamily="34" charset="0"/>
+                <a:ea typeface="IBM Plex Mono" pitchFamily="34" charset="-122"/>
+                <a:cs typeface="IBM Plex Mono" pitchFamily="34" charset="-120"/>
+              </a:rPr>
+              <a:t>C</a:t>
+            </a:r>
+            <a:endParaRPr lang="en-US" sz="1300" dirty="0"/>
+          </a:p>
+        </p:txBody>
+      </p:sp>
+      <p:sp>
+        <p:nvSpPr>
+          <p:cNvPr id="22" name="Text 20"/>
+          <p:cNvSpPr txBox="1"/>
+          <p:nvPr/>
+        </p:nvSpPr>
+        <p:spPr>
+          <a:xfrm>
+            <a:off x="6720840" y="3886200"/>
+            <a:ext cx="4754880" cy="731520"/>
+          </a:xfrm>
+          <a:prstGeom prst="rect">
+            <a:avLst/>
+          </a:prstGeom>
+          <a:noFill/>
+          <a:ln/>
+        </p:spPr>
+        <p:txBody>
+          <a:bodyPr wrap="square" lIns="0" tIns="0" rIns="0" bIns="0" rtlCol="0" anchor="ctr"/>
+          <a:lstStyle/>
+          <a:p>
+            <a:pPr indent="0" marL="0">
+              <a:lnSpc>
+                <a:spcPct val="115000"/>
+              </a:lnSpc>
+              <a:buNone/>
+            </a:pPr>
+            <a:r>
+              <a:rPr lang="en-US" sz="1700" dirty="0">
+                <a:solidFill>
+                  <a:srgbClr val="101828"/>
+                </a:solidFill>
+                <a:latin typeface="IBM Plex Sans" pitchFamily="34" charset="0"/>
+                <a:ea typeface="IBM Plex Sans" pitchFamily="34" charset="-122"/>
+                <a:cs typeface="IBM Plex Sans" pitchFamily="34" charset="-120"/>
+              </a:rPr>
+              <a:t>5</a:t>
+            </a:r>
+            <a:endParaRPr lang="en-US" sz="1700" dirty="0"/>
+          </a:p>
+          <a:p>
+            <a:pPr indent="0" marL="0">
+              <a:lnSpc>
+                <a:spcPct val="115000"/>
+              </a:lnSpc>
+              <a:buNone/>
+            </a:pPr>
+            <a:r>
+              <a:rPr lang="en-US" sz="1700" dirty="0">
+                <a:solidFill>
+                  <a:srgbClr val="101828"/>
+                </a:solidFill>
+                <a:latin typeface="IBM Plex Sans" pitchFamily="34" charset="0"/>
+                <a:ea typeface="IBM Plex Sans" pitchFamily="34" charset="-122"/>
+                <a:cs typeface="IBM Plex Sans" pitchFamily="34" charset="-120"/>
+              </a:rPr>
+              <a:t>-1</a:t>
+            </a:r>
+            <a:endParaRPr lang="en-US" sz="1700" dirty="0"/>
           </a:p>
         </p:txBody>
       </p:sp>
@@ -3281,14 +3870,75 @@
       </p:sp>
       <p:sp>
         <p:nvSpPr>
-          <p:cNvPr id="5" name="Text 3"/>
-          <p:cNvSpPr txBox="1"/>
-          <p:nvPr/>
-        </p:nvSpPr>
-        <p:spPr>
-          <a:xfrm>
-            <a:off x="502920" y="411480"/>
-            <a:ext cx="11155680" cy="777240"/>
+          <p:cNvPr id="5" name="Shape 3"/>
+          <p:cNvSpPr/>
+          <p:nvPr/>
+        </p:nvSpPr>
+        <p:spPr>
+          <a:xfrm>
+            <a:off x="502920" y="438912"/>
+            <a:ext cx="3108960" cy="502920"/>
+          </a:xfrm>
+          <a:prstGeom prst="roundRect">
+            <a:avLst>
+              <a:gd name="adj" fmla="val 18182"/>
+            </a:avLst>
+          </a:prstGeom>
+          <a:solidFill>
+            <a:srgbClr val="F4B942"/>
+          </a:solidFill>
+          <a:ln/>
+        </p:spPr>
+      </p:sp>
+      <p:sp>
+        <p:nvSpPr>
+          <p:cNvPr id="6" name="Text 4"/>
+          <p:cNvSpPr txBox="1"/>
+          <p:nvPr/>
+        </p:nvSpPr>
+        <p:spPr>
+          <a:xfrm>
+            <a:off x="502920" y="438912"/>
+            <a:ext cx="3108960" cy="502920"/>
+          </a:xfrm>
+          <a:prstGeom prst="rect">
+            <a:avLst/>
+          </a:prstGeom>
+          <a:noFill/>
+          <a:ln/>
+        </p:spPr>
+        <p:txBody>
+          <a:bodyPr wrap="square" lIns="0" tIns="0" rIns="0" bIns="0" rtlCol="0" anchor="ctr"/>
+          <a:lstStyle/>
+          <a:p>
+            <a:pPr algn="ctr" indent="0" marL="0">
+              <a:buNone/>
+            </a:pPr>
+            <a:r>
+              <a:rPr lang="en-US" sz="1300" b="1" dirty="0">
+                <a:solidFill>
+                  <a:srgbClr val="101828"/>
+                </a:solidFill>
+                <a:latin typeface="IBM Plex Mono" pitchFamily="34" charset="0"/>
+                <a:ea typeface="IBM Plex Mono" pitchFamily="34" charset="-122"/>
+                <a:cs typeface="IBM Plex Mono" pitchFamily="34" charset="-120"/>
+              </a:rPr>
+              <a:t>★  FINAL CHALLENGE</a:t>
+            </a:r>
+            <a:endParaRPr lang="en-US" sz="1300" dirty="0"/>
+          </a:p>
+        </p:txBody>
+      </p:sp>
+      <p:sp>
+        <p:nvSpPr>
+          <p:cNvPr id="7" name="Text 5"/>
+          <p:cNvSpPr txBox="1"/>
+          <p:nvPr/>
+        </p:nvSpPr>
+        <p:spPr>
+          <a:xfrm>
+            <a:off x="502920" y="1097280"/>
+            <a:ext cx="11155680" cy="731520"/>
           </a:xfrm>
           <a:prstGeom prst="rect">
             <a:avLst/>
@@ -3304,7 +3954,7 @@
               <a:buNone/>
             </a:pPr>
             <a:r>
-              <a:rPr lang="en-US" sz="3200" b="1" dirty="0">
+              <a:rPr lang="en-US" sz="3400" b="1" dirty="0">
                 <a:solidFill>
                   <a:srgbClr val="101828"/>
                 </a:solidFill>
@@ -3312,65 +3962,26 @@
                 <a:ea typeface="IBM Plex Sans" pitchFamily="34" charset="-122"/>
                 <a:cs typeface="IBM Plex Sans" pitchFamily="34" charset="-120"/>
               </a:rPr>
-              <a:t>Worth knowing</a:t>
-            </a:r>
-            <a:endParaRPr lang="en-US" sz="3200" dirty="0"/>
-          </a:p>
-        </p:txBody>
-      </p:sp>
-      <p:sp>
-        <p:nvSpPr>
-          <p:cNvPr id="6" name="Text 4"/>
-          <p:cNvSpPr txBox="1"/>
-          <p:nvPr/>
-        </p:nvSpPr>
-        <p:spPr>
-          <a:xfrm>
-            <a:off x="502920" y="1170432"/>
-            <a:ext cx="11155680" cy="411480"/>
-          </a:xfrm>
-          <a:prstGeom prst="rect">
-            <a:avLst/>
-          </a:prstGeom>
-          <a:noFill/>
-          <a:ln/>
-        </p:spPr>
-        <p:txBody>
-          <a:bodyPr wrap="square" lIns="0" tIns="0" rIns="0" bIns="0" rtlCol="0" anchor="ctr"/>
-          <a:lstStyle/>
-          <a:p>
-            <a:pPr indent="0" marL="0">
-              <a:buNone/>
-            </a:pPr>
-            <a:r>
-              <a:rPr lang="en-US" sz="1500" dirty="0">
-                <a:solidFill>
-                  <a:srgbClr val="667085"/>
-                </a:solidFill>
-                <a:latin typeface="IBM Plex Sans" pitchFamily="34" charset="0"/>
-                <a:ea typeface="IBM Plex Sans" pitchFamily="34" charset="-122"/>
-                <a:cs typeface="IBM Plex Sans" pitchFamily="34" charset="-120"/>
-              </a:rPr>
-              <a:t>The information markers dotted around the room</a:t>
-            </a:r>
-            <a:endParaRPr lang="en-US" sz="1500" dirty="0"/>
-          </a:p>
-        </p:txBody>
-      </p:sp>
-      <p:sp>
-        <p:nvSpPr>
-          <p:cNvPr id="7" name="Shape 5"/>
+              <a:t>What does it give?</a:t>
+            </a:r>
+            <a:endParaRPr lang="en-US" sz="3400" dirty="0"/>
+          </a:p>
+        </p:txBody>
+      </p:sp>
+      <p:sp>
+        <p:nvSpPr>
+          <p:cNvPr id="8" name="Shape 6"/>
           <p:cNvSpPr/>
           <p:nvPr/>
         </p:nvSpPr>
         <p:spPr>
           <a:xfrm>
-            <a:off x="502920" y="1828800"/>
-            <a:ext cx="5394960" cy="1737360"/>
+            <a:off x="502920" y="2011680"/>
+            <a:ext cx="11155680" cy="2194560"/>
           </a:xfrm>
           <a:prstGeom prst="roundRect">
             <a:avLst>
-              <a:gd name="adj" fmla="val 6316"/>
+              <a:gd name="adj" fmla="val 5000"/>
             </a:avLst>
           </a:prstGeom>
           <a:solidFill>
@@ -3386,14 +3997,14 @@
       </p:sp>
       <p:sp>
         <p:nvSpPr>
-          <p:cNvPr id="8" name="Text 6"/>
-          <p:cNvSpPr txBox="1"/>
-          <p:nvPr/>
-        </p:nvSpPr>
-        <p:spPr>
-          <a:xfrm>
-            <a:off x="822960" y="2011680"/>
-            <a:ext cx="4754880" cy="365760"/>
+          <p:cNvPr id="9" name="Text 7"/>
+          <p:cNvSpPr txBox="1"/>
+          <p:nvPr/>
+        </p:nvSpPr>
+        <p:spPr>
+          <a:xfrm>
+            <a:off x="1005840" y="2331720"/>
+            <a:ext cx="10149840" cy="1554480"/>
           </a:xfrm>
           <a:prstGeom prst="rect">
             <a:avLst/>
@@ -3406,52 +4017,52 @@
           <a:lstStyle/>
           <a:p>
             <a:pPr indent="0" marL="0">
-              <a:buNone/>
-            </a:pPr>
-            <a:r>
-              <a:rPr lang="en-US" sz="1600" b="1" dirty="0">
-                <a:solidFill>
-                  <a:srgbClr val="2D63FF"/>
+              <a:lnSpc>
+                <a:spcPct val="130000"/>
+              </a:lnSpc>
+              <a:buNone/>
+            </a:pPr>
+            <a:r>
+              <a:rPr lang="en-US" sz="2200" dirty="0">
+                <a:solidFill>
+                  <a:srgbClr val="101828"/>
                 </a:solidFill>
                 <a:latin typeface="IBM Plex Sans" pitchFamily="34" charset="0"/>
                 <a:ea typeface="IBM Plex Sans" pitchFamily="34" charset="-122"/>
                 <a:cs typeface="IBM Plex Sans" pitchFamily="34" charset="-120"/>
               </a:rPr>
-              <a:t>Spaces count</a:t>
-            </a:r>
-            <a:endParaRPr lang="en-US" sz="1600" dirty="0"/>
-          </a:p>
-        </p:txBody>
-      </p:sp>
-      <p:sp>
-        <p:nvSpPr>
-          <p:cNvPr id="9" name="Text 7"/>
-          <p:cNvSpPr txBox="1"/>
-          <p:nvPr/>
-        </p:nvSpPr>
-        <p:spPr>
-          <a:xfrm>
-            <a:off x="822960" y="2395728"/>
-            <a:ext cx="4754880" cy="1005840"/>
-          </a:xfrm>
-          <a:prstGeom prst="rect">
-            <a:avLst/>
-          </a:prstGeom>
-          <a:noFill/>
-          <a:ln/>
-        </p:spPr>
-        <p:txBody>
-          <a:bodyPr wrap="square" lIns="0" tIns="0" rIns="0" bIns="0" rtlCol="0" anchor="t"/>
+              <a:t>A variable called word holds LANTERN. Tap the star and match each piece of Python to what it gives back.</a:t>
+            </a:r>
+            <a:endParaRPr lang="en-US" sz="2200" dirty="0"/>
+          </a:p>
+        </p:txBody>
+      </p:sp>
+      <p:sp>
+        <p:nvSpPr>
+          <p:cNvPr id="10" name="Text 8"/>
+          <p:cNvSpPr txBox="1"/>
+          <p:nvPr/>
+        </p:nvSpPr>
+        <p:spPr>
+          <a:xfrm>
+            <a:off x="502920" y="4526280"/>
+            <a:ext cx="11155680" cy="457200"/>
+          </a:xfrm>
+          <a:prstGeom prst="rect">
+            <a:avLst/>
+          </a:prstGeom>
+          <a:noFill/>
+          <a:ln/>
+        </p:spPr>
+        <p:txBody>
+          <a:bodyPr wrap="square" lIns="0" tIns="0" rIns="0" bIns="0" rtlCol="0" anchor="ctr"/>
           <a:lstStyle/>
           <a:p>
             <a:pPr indent="0" marL="0">
-              <a:lnSpc>
-                <a:spcPct val="120000"/>
-              </a:lnSpc>
-              <a:buNone/>
-            </a:pPr>
-            <a:r>
-              <a:rPr lang="en-US" sz="1300" dirty="0">
+              <a:buNone/>
+            </a:pPr>
+            <a:r>
+              <a:rPr lang="en-US" sz="1600" dirty="0">
                 <a:solidFill>
                   <a:srgbClr val="667085"/>
                 </a:solidFill>
@@ -3459,333 +4070,9 @@
                 <a:ea typeface="IBM Plex Sans" pitchFamily="34" charset="-122"/>
                 <a:cs typeface="IBM Plex Sans" pitchFamily="34" charset="-120"/>
               </a:rPr>
-              <a:t>len() counts every character, so a space, a comma and a full stop each add one to the length.</a:t>
-            </a:r>
-            <a:endParaRPr lang="en-US" sz="1300" dirty="0"/>
-          </a:p>
-        </p:txBody>
-      </p:sp>
-      <p:sp>
-        <p:nvSpPr>
-          <p:cNvPr id="10" name="Shape 8"/>
-          <p:cNvSpPr/>
-          <p:nvPr/>
-        </p:nvSpPr>
-        <p:spPr>
-          <a:xfrm>
-            <a:off x="6217920" y="1828800"/>
-            <a:ext cx="5394960" cy="1737360"/>
-          </a:xfrm>
-          <a:prstGeom prst="roundRect">
-            <a:avLst>
-              <a:gd name="adj" fmla="val 6316"/>
-            </a:avLst>
-          </a:prstGeom>
-          <a:solidFill>
-            <a:srgbClr val="FFFFFF"/>
-          </a:solidFill>
-          <a:ln w="15875">
-            <a:solidFill>
-              <a:srgbClr val="08A6A6"/>
-            </a:solidFill>
-            <a:prstDash val="solid"/>
-          </a:ln>
-        </p:spPr>
-      </p:sp>
-      <p:sp>
-        <p:nvSpPr>
-          <p:cNvPr id="11" name="Text 9"/>
-          <p:cNvSpPr txBox="1"/>
-          <p:nvPr/>
-        </p:nvSpPr>
-        <p:spPr>
-          <a:xfrm>
-            <a:off x="6537960" y="2011680"/>
-            <a:ext cx="4754880" cy="365760"/>
-          </a:xfrm>
-          <a:prstGeom prst="rect">
-            <a:avLst/>
-          </a:prstGeom>
-          <a:noFill/>
-          <a:ln/>
-        </p:spPr>
-        <p:txBody>
-          <a:bodyPr wrap="square" lIns="0" tIns="0" rIns="0" bIns="0" rtlCol="0" anchor="ctr"/>
-          <a:lstStyle/>
-          <a:p>
-            <a:pPr indent="0" marL="0">
-              <a:buNone/>
-            </a:pPr>
-            <a:r>
-              <a:rPr lang="en-US" sz="1600" b="1" dirty="0">
-                <a:solidFill>
-                  <a:srgbClr val="08A6A6"/>
-                </a:solidFill>
-                <a:latin typeface="IBM Plex Sans" pitchFamily="34" charset="0"/>
-                <a:ea typeface="IBM Plex Sans" pitchFamily="34" charset="-122"/>
-                <a:cs typeface="IBM Plex Sans" pitchFamily="34" charset="-120"/>
-              </a:rPr>
-              <a:t>Open ends</a:t>
+              <a:t>Predict on paper first, then look down and test it.</a:t>
             </a:r>
             <a:endParaRPr lang="en-US" sz="1600" dirty="0"/>
-          </a:p>
-        </p:txBody>
-      </p:sp>
-      <p:sp>
-        <p:nvSpPr>
-          <p:cNvPr id="12" name="Text 10"/>
-          <p:cNvSpPr txBox="1"/>
-          <p:nvPr/>
-        </p:nvSpPr>
-        <p:spPr>
-          <a:xfrm>
-            <a:off x="6537960" y="2395728"/>
-            <a:ext cx="4754880" cy="1005840"/>
-          </a:xfrm>
-          <a:prstGeom prst="rect">
-            <a:avLst/>
-          </a:prstGeom>
-          <a:noFill/>
-          <a:ln/>
-        </p:spPr>
-        <p:txBody>
-          <a:bodyPr wrap="square" lIns="0" tIns="0" rIns="0" bIns="0" rtlCol="0" anchor="t"/>
-          <a:lstStyle/>
-          <a:p>
-            <a:pPr indent="0" marL="0">
-              <a:lnSpc>
-                <a:spcPct val="120000"/>
-              </a:lnSpc>
-              <a:buNone/>
-            </a:pPr>
-            <a:r>
-              <a:rPr lang="en-US" sz="1300" dirty="0">
-                <a:solidFill>
-                  <a:srgbClr val="667085"/>
-                </a:solidFill>
-                <a:latin typeface="IBM Plex Sans" pitchFamily="34" charset="0"/>
-                <a:ea typeface="IBM Plex Sans" pitchFamily="34" charset="-122"/>
-                <a:cs typeface="IBM Plex Sans" pitchFamily="34" charset="-120"/>
-              </a:rPr>
-              <a:t>A slice can leave a number out: word[:3] starts at the beginning and word[3:] runs to the end.</a:t>
-            </a:r>
-            <a:endParaRPr lang="en-US" sz="1300" dirty="0"/>
-          </a:p>
-        </p:txBody>
-      </p:sp>
-      <p:sp>
-        <p:nvSpPr>
-          <p:cNvPr id="13" name="Shape 11"/>
-          <p:cNvSpPr/>
-          <p:nvPr/>
-        </p:nvSpPr>
-        <p:spPr>
-          <a:xfrm>
-            <a:off x="502920" y="3794760"/>
-            <a:ext cx="5394960" cy="1737360"/>
-          </a:xfrm>
-          <a:prstGeom prst="roundRect">
-            <a:avLst>
-              <a:gd name="adj" fmla="val 6316"/>
-            </a:avLst>
-          </a:prstGeom>
-          <a:solidFill>
-            <a:srgbClr val="FFFFFF"/>
-          </a:solidFill>
-          <a:ln w="15875">
-            <a:solidFill>
-              <a:srgbClr val="2D63FF"/>
-            </a:solidFill>
-            <a:prstDash val="solid"/>
-          </a:ln>
-        </p:spPr>
-      </p:sp>
-      <p:sp>
-        <p:nvSpPr>
-          <p:cNvPr id="14" name="Text 12"/>
-          <p:cNvSpPr txBox="1"/>
-          <p:nvPr/>
-        </p:nvSpPr>
-        <p:spPr>
-          <a:xfrm>
-            <a:off x="822960" y="3977640"/>
-            <a:ext cx="4754880" cy="365760"/>
-          </a:xfrm>
-          <a:prstGeom prst="rect">
-            <a:avLst/>
-          </a:prstGeom>
-          <a:noFill/>
-          <a:ln/>
-        </p:spPr>
-        <p:txBody>
-          <a:bodyPr wrap="square" lIns="0" tIns="0" rIns="0" bIns="0" rtlCol="0" anchor="ctr"/>
-          <a:lstStyle/>
-          <a:p>
-            <a:pPr indent="0" marL="0">
-              <a:buNone/>
-            </a:pPr>
-            <a:r>
-              <a:rPr lang="en-US" sz="1600" b="1" dirty="0">
-                <a:solidFill>
-                  <a:srgbClr val="2D63FF"/>
-                </a:solidFill>
-                <a:latin typeface="IBM Plex Sans" pitchFamily="34" charset="0"/>
-                <a:ea typeface="IBM Plex Sans" pitchFamily="34" charset="-122"/>
-                <a:cs typeface="IBM Plex Sans" pitchFamily="34" charset="-120"/>
-              </a:rPr>
-              <a:t>Nothing is changed</a:t>
-            </a:r>
-            <a:endParaRPr lang="en-US" sz="1600" dirty="0"/>
-          </a:p>
-        </p:txBody>
-      </p:sp>
-      <p:sp>
-        <p:nvSpPr>
-          <p:cNvPr id="15" name="Text 13"/>
-          <p:cNvSpPr txBox="1"/>
-          <p:nvPr/>
-        </p:nvSpPr>
-        <p:spPr>
-          <a:xfrm>
-            <a:off x="822960" y="4361688"/>
-            <a:ext cx="4754880" cy="1005840"/>
-          </a:xfrm>
-          <a:prstGeom prst="rect">
-            <a:avLst/>
-          </a:prstGeom>
-          <a:noFill/>
-          <a:ln/>
-        </p:spPr>
-        <p:txBody>
-          <a:bodyPr wrap="square" lIns="0" tIns="0" rIns="0" bIns="0" rtlCol="0" anchor="t"/>
-          <a:lstStyle/>
-          <a:p>
-            <a:pPr indent="0" marL="0">
-              <a:lnSpc>
-                <a:spcPct val="120000"/>
-              </a:lnSpc>
-              <a:buNone/>
-            </a:pPr>
-            <a:r>
-              <a:rPr lang="en-US" sz="1300" dirty="0">
-                <a:solidFill>
-                  <a:srgbClr val="667085"/>
-                </a:solidFill>
-                <a:latin typeface="IBM Plex Sans" pitchFamily="34" charset="0"/>
-                <a:ea typeface="IBM Plex Sans" pitchFamily="34" charset="-122"/>
-                <a:cs typeface="IBM Plex Sans" pitchFamily="34" charset="-120"/>
-              </a:rPr>
-              <a:t>upper() does not change the original - it hands back a new string. Strings in Python cannot be edited in place.</a:t>
-            </a:r>
-            <a:endParaRPr lang="en-US" sz="1300" dirty="0"/>
-          </a:p>
-        </p:txBody>
-      </p:sp>
-      <p:sp>
-        <p:nvSpPr>
-          <p:cNvPr id="16" name="Shape 14"/>
-          <p:cNvSpPr/>
-          <p:nvPr/>
-        </p:nvSpPr>
-        <p:spPr>
-          <a:xfrm>
-            <a:off x="6217920" y="3794760"/>
-            <a:ext cx="5394960" cy="1737360"/>
-          </a:xfrm>
-          <a:prstGeom prst="roundRect">
-            <a:avLst>
-              <a:gd name="adj" fmla="val 6316"/>
-            </a:avLst>
-          </a:prstGeom>
-          <a:solidFill>
-            <a:srgbClr val="FFFFFF"/>
-          </a:solidFill>
-          <a:ln w="15875">
-            <a:solidFill>
-              <a:srgbClr val="08A6A6"/>
-            </a:solidFill>
-            <a:prstDash val="solid"/>
-          </a:ln>
-        </p:spPr>
-      </p:sp>
-      <p:sp>
-        <p:nvSpPr>
-          <p:cNvPr id="17" name="Text 15"/>
-          <p:cNvSpPr txBox="1"/>
-          <p:nvPr/>
-        </p:nvSpPr>
-        <p:spPr>
-          <a:xfrm>
-            <a:off x="6537960" y="3977640"/>
-            <a:ext cx="4754880" cy="365760"/>
-          </a:xfrm>
-          <a:prstGeom prst="rect">
-            <a:avLst/>
-          </a:prstGeom>
-          <a:noFill/>
-          <a:ln/>
-        </p:spPr>
-        <p:txBody>
-          <a:bodyPr wrap="square" lIns="0" tIns="0" rIns="0" bIns="0" rtlCol="0" anchor="ctr"/>
-          <a:lstStyle/>
-          <a:p>
-            <a:pPr indent="0" marL="0">
-              <a:buNone/>
-            </a:pPr>
-            <a:r>
-              <a:rPr lang="en-US" sz="1600" b="1" dirty="0">
-                <a:solidFill>
-                  <a:srgbClr val="08A6A6"/>
-                </a:solidFill>
-                <a:latin typeface="IBM Plex Sans" pitchFamily="34" charset="0"/>
-                <a:ea typeface="IBM Plex Sans" pitchFamily="34" charset="-122"/>
-                <a:cs typeface="IBM Plex Sans" pitchFamily="34" charset="-120"/>
-              </a:rPr>
-              <a:t>Searching fairly</a:t>
-            </a:r>
-            <a:endParaRPr lang="en-US" sz="1600" dirty="0"/>
-          </a:p>
-        </p:txBody>
-      </p:sp>
-      <p:sp>
-        <p:nvSpPr>
-          <p:cNvPr id="18" name="Text 16"/>
-          <p:cNvSpPr txBox="1"/>
-          <p:nvPr/>
-        </p:nvSpPr>
-        <p:spPr>
-          <a:xfrm>
-            <a:off x="6537960" y="4361688"/>
-            <a:ext cx="4754880" cy="1005840"/>
-          </a:xfrm>
-          <a:prstGeom prst="rect">
-            <a:avLst/>
-          </a:prstGeom>
-          <a:noFill/>
-          <a:ln/>
-        </p:spPr>
-        <p:txBody>
-          <a:bodyPr wrap="square" lIns="0" tIns="0" rIns="0" bIns="0" rtlCol="0" anchor="t"/>
-          <a:lstStyle/>
-          <a:p>
-            <a:pPr indent="0" marL="0">
-              <a:lnSpc>
-                <a:spcPct val="120000"/>
-              </a:lnSpc>
-              <a:buNone/>
-            </a:pPr>
-            <a:r>
-              <a:rPr lang="en-US" sz="1300" dirty="0">
-                <a:solidFill>
-                  <a:srgbClr val="667085"/>
-                </a:solidFill>
-                <a:latin typeface="IBM Plex Sans" pitchFamily="34" charset="0"/>
-                <a:ea typeface="IBM Plex Sans" pitchFamily="34" charset="-122"/>
-                <a:cs typeface="IBM Plex Sans" pitchFamily="34" charset="-120"/>
-              </a:rPr>
-              <a:t>To search without caring about capitals, lower() both the text and the thing you are looking for before you search.</a:t>
-            </a:r>
-            <a:endParaRPr lang="en-US" sz="1300" dirty="0"/>
           </a:p>
         </p:txBody>
       </p:sp>
@@ -3952,7 +4239,7 @@
                 <a:ea typeface="IBM Plex Sans" pitchFamily="34" charset="-122"/>
                 <a:cs typeface="IBM Plex Sans" pitchFamily="34" charset="-120"/>
               </a:rPr>
-              <a:t>Exam practice</a:t>
+              <a:t>Worth knowing</a:t>
             </a:r>
             <a:endParaRPr lang="en-US" sz="3200" dirty="0"/>
           </a:p>
@@ -3991,7 +4278,7 @@
                 <a:ea typeface="IBM Plex Sans" pitchFamily="34" charset="-122"/>
                 <a:cs typeface="IBM Plex Sans" pitchFamily="34" charset="-120"/>
               </a:rPr>
-              <a:t>Devices away. Answer from memory on the worksheet.</a:t>
+              <a:t>The information markers dotted around the room</a:t>
             </a:r>
             <a:endParaRPr lang="en-US" sz="1500" dirty="0"/>
           </a:p>
@@ -4006,11 +4293,11 @@
         <p:spPr>
           <a:xfrm>
             <a:off x="502920" y="1828800"/>
-            <a:ext cx="11155680" cy="1097280"/>
+            <a:ext cx="5394960" cy="1737360"/>
           </a:xfrm>
           <a:prstGeom prst="roundRect">
             <a:avLst>
-              <a:gd name="adj" fmla="val 10000"/>
+              <a:gd name="adj" fmla="val 6316"/>
             </a:avLst>
           </a:prstGeom>
           <a:solidFill>
@@ -4018,7 +4305,7 @@
           </a:solidFill>
           <a:ln w="15875">
             <a:solidFill>
-              <a:srgbClr val="D9DEE7"/>
+              <a:srgbClr val="2D63FF"/>
             </a:solidFill>
             <a:prstDash val="solid"/>
           </a:ln>
@@ -4032,8 +4319,8 @@
         </p:nvSpPr>
         <p:spPr>
           <a:xfrm>
-            <a:off x="914400" y="1938528"/>
-            <a:ext cx="9418320" cy="877824"/>
+            <a:off x="822960" y="2011680"/>
+            <a:ext cx="4754880" cy="365760"/>
           </a:xfrm>
           <a:prstGeom prst="rect">
             <a:avLst/>
@@ -4046,288 +4333,79 @@
           <a:lstStyle/>
           <a:p>
             <a:pPr indent="0" marL="0">
-              <a:lnSpc>
-                <a:spcPct val="118000"/>
-              </a:lnSpc>
-              <a:buNone/>
-            </a:pPr>
-            <a:r>
-              <a:rPr lang="en-US" sz="1700" dirty="0">
-                <a:solidFill>
-                  <a:srgbClr val="101828"/>
+              <a:buNone/>
+            </a:pPr>
+            <a:r>
+              <a:rPr lang="en-US" sz="1600" b="1" dirty="0">
+                <a:solidFill>
+                  <a:srgbClr val="2D63FF"/>
                 </a:solidFill>
                 <a:latin typeface="IBM Plex Sans" pitchFamily="34" charset="0"/>
                 <a:ea typeface="IBM Plex Sans" pitchFamily="34" charset="-122"/>
                 <a:cs typeface="IBM Plex Sans" pitchFamily="34" charset="-120"/>
               </a:rPr>
-              <a:t>A program tries to print the last character of a word with </a:t>
-            </a:r>
+              <a:t>Spaces count</a:t>
+            </a:r>
+            <a:endParaRPr lang="en-US" sz="1600" dirty="0"/>
+          </a:p>
+        </p:txBody>
+      </p:sp>
+      <p:sp>
+        <p:nvSpPr>
+          <p:cNvPr id="9" name="Text 7"/>
+          <p:cNvSpPr txBox="1"/>
+          <p:nvPr/>
+        </p:nvSpPr>
+        <p:spPr>
+          <a:xfrm>
+            <a:off x="822960" y="2395728"/>
+            <a:ext cx="4754880" cy="1005840"/>
+          </a:xfrm>
+          <a:prstGeom prst="rect">
+            <a:avLst/>
+          </a:prstGeom>
+          <a:noFill/>
+          <a:ln/>
+        </p:spPr>
+        <p:txBody>
+          <a:bodyPr wrap="square" lIns="0" tIns="0" rIns="0" bIns="0" rtlCol="0" anchor="t"/>
+          <a:lstStyle/>
+          <a:p>
             <a:pPr indent="0" marL="0">
               <a:lnSpc>
-                <a:spcPct val="118000"/>
+                <a:spcPct val="120000"/>
               </a:lnSpc>
               <a:buNone/>
             </a:pPr>
             <a:r>
-              <a:rPr lang="en-US" sz="1700" dirty="0">
-                <a:solidFill>
-                  <a:srgbClr val="1D4ED8"/>
-                </a:solidFill>
-                <a:latin typeface="IBM Plex Mono" pitchFamily="34" charset="0"/>
-                <a:ea typeface="IBM Plex Mono" pitchFamily="34" charset="-122"/>
-                <a:cs typeface="IBM Plex Mono" pitchFamily="34" charset="-120"/>
-              </a:rPr>
-              <a:t>print</a:t>
-            </a:r>
-            <a:pPr indent="0" marL="0">
-              <a:lnSpc>
-                <a:spcPct val="118000"/>
-              </a:lnSpc>
-              <a:buNone/>
-            </a:pPr>
-            <a:r>
-              <a:rPr lang="en-US" sz="1700" dirty="0">
-                <a:solidFill>
-                  <a:srgbClr val="3F3F46"/>
-                </a:solidFill>
-                <a:latin typeface="IBM Plex Mono" pitchFamily="34" charset="0"/>
-                <a:ea typeface="IBM Plex Mono" pitchFamily="34" charset="-122"/>
-                <a:cs typeface="IBM Plex Mono" pitchFamily="34" charset="-120"/>
-              </a:rPr>
-              <a:t>(</a:t>
-            </a:r>
-            <a:pPr indent="0" marL="0">
-              <a:lnSpc>
-                <a:spcPct val="118000"/>
-              </a:lnSpc>
-              <a:buNone/>
-            </a:pPr>
-            <a:r>
-              <a:rPr lang="en-US" sz="1700" dirty="0">
-                <a:solidFill>
-                  <a:srgbClr val="18181B"/>
-                </a:solidFill>
-                <a:latin typeface="IBM Plex Mono" pitchFamily="34" charset="0"/>
-                <a:ea typeface="IBM Plex Mono" pitchFamily="34" charset="-122"/>
-                <a:cs typeface="IBM Plex Mono" pitchFamily="34" charset="-120"/>
-              </a:rPr>
-              <a:t>word</a:t>
-            </a:r>
-            <a:pPr indent="0" marL="0">
-              <a:lnSpc>
-                <a:spcPct val="118000"/>
-              </a:lnSpc>
-              <a:buNone/>
-            </a:pPr>
-            <a:r>
-              <a:rPr lang="en-US" sz="1700" dirty="0">
-                <a:solidFill>
-                  <a:srgbClr val="3F3F46"/>
-                </a:solidFill>
-                <a:latin typeface="IBM Plex Mono" pitchFamily="34" charset="0"/>
-                <a:ea typeface="IBM Plex Mono" pitchFamily="34" charset="-122"/>
-                <a:cs typeface="IBM Plex Mono" pitchFamily="34" charset="-120"/>
-              </a:rPr>
-              <a:t>[</a:t>
-            </a:r>
-            <a:pPr indent="0" marL="0">
-              <a:lnSpc>
-                <a:spcPct val="118000"/>
-              </a:lnSpc>
-              <a:buNone/>
-            </a:pPr>
-            <a:r>
-              <a:rPr lang="en-US" sz="1700" dirty="0">
-                <a:solidFill>
-                  <a:srgbClr val="1D4ED8"/>
-                </a:solidFill>
-                <a:latin typeface="IBM Plex Mono" pitchFamily="34" charset="0"/>
-                <a:ea typeface="IBM Plex Mono" pitchFamily="34" charset="-122"/>
-                <a:cs typeface="IBM Plex Mono" pitchFamily="34" charset="-120"/>
-              </a:rPr>
-              <a:t>len</a:t>
-            </a:r>
-            <a:pPr indent="0" marL="0">
-              <a:lnSpc>
-                <a:spcPct val="118000"/>
-              </a:lnSpc>
-              <a:buNone/>
-            </a:pPr>
-            <a:r>
-              <a:rPr lang="en-US" sz="1700" dirty="0">
-                <a:solidFill>
-                  <a:srgbClr val="3F3F46"/>
-                </a:solidFill>
-                <a:latin typeface="IBM Plex Mono" pitchFamily="34" charset="0"/>
-                <a:ea typeface="IBM Plex Mono" pitchFamily="34" charset="-122"/>
-                <a:cs typeface="IBM Plex Mono" pitchFamily="34" charset="-120"/>
-              </a:rPr>
-              <a:t>(</a:t>
-            </a:r>
-            <a:pPr indent="0" marL="0">
-              <a:lnSpc>
-                <a:spcPct val="118000"/>
-              </a:lnSpc>
-              <a:buNone/>
-            </a:pPr>
-            <a:r>
-              <a:rPr lang="en-US" sz="1700" dirty="0">
-                <a:solidFill>
-                  <a:srgbClr val="18181B"/>
-                </a:solidFill>
-                <a:latin typeface="IBM Plex Mono" pitchFamily="34" charset="0"/>
-                <a:ea typeface="IBM Plex Mono" pitchFamily="34" charset="-122"/>
-                <a:cs typeface="IBM Plex Mono" pitchFamily="34" charset="-120"/>
-              </a:rPr>
-              <a:t>word</a:t>
-            </a:r>
-            <a:pPr indent="0" marL="0">
-              <a:lnSpc>
-                <a:spcPct val="118000"/>
-              </a:lnSpc>
-              <a:buNone/>
-            </a:pPr>
-            <a:r>
-              <a:rPr lang="en-US" sz="1700" dirty="0">
-                <a:solidFill>
-                  <a:srgbClr val="3F3F46"/>
-                </a:solidFill>
-                <a:latin typeface="IBM Plex Mono" pitchFamily="34" charset="0"/>
-                <a:ea typeface="IBM Plex Mono" pitchFamily="34" charset="-122"/>
-                <a:cs typeface="IBM Plex Mono" pitchFamily="34" charset="-120"/>
-              </a:rPr>
-              <a:t>)</a:t>
-            </a:r>
-            <a:pPr indent="0" marL="0">
-              <a:lnSpc>
-                <a:spcPct val="118000"/>
-              </a:lnSpc>
-              <a:buNone/>
-            </a:pPr>
-            <a:r>
-              <a:rPr lang="en-US" sz="1700" dirty="0">
-                <a:solidFill>
-                  <a:srgbClr val="3F3F46"/>
-                </a:solidFill>
-                <a:latin typeface="IBM Plex Mono" pitchFamily="34" charset="0"/>
-                <a:ea typeface="IBM Plex Mono" pitchFamily="34" charset="-122"/>
-                <a:cs typeface="IBM Plex Mono" pitchFamily="34" charset="-120"/>
-              </a:rPr>
-              <a:t>]</a:t>
-            </a:r>
-            <a:pPr indent="0" marL="0">
-              <a:lnSpc>
-                <a:spcPct val="118000"/>
-              </a:lnSpc>
-              <a:buNone/>
-            </a:pPr>
-            <a:r>
-              <a:rPr lang="en-US" sz="1700" dirty="0">
-                <a:solidFill>
-                  <a:srgbClr val="3F3F46"/>
-                </a:solidFill>
-                <a:latin typeface="IBM Plex Mono" pitchFamily="34" charset="0"/>
-                <a:ea typeface="IBM Plex Mono" pitchFamily="34" charset="-122"/>
-                <a:cs typeface="IBM Plex Mono" pitchFamily="34" charset="-120"/>
-              </a:rPr>
-              <a:t>)</a:t>
-            </a:r>
-            <a:pPr indent="0" marL="0">
-              <a:lnSpc>
-                <a:spcPct val="118000"/>
-              </a:lnSpc>
-              <a:buNone/>
-            </a:pPr>
-            <a:r>
-              <a:rPr lang="en-US" sz="1700" dirty="0">
-                <a:solidFill>
-                  <a:srgbClr val="101828"/>
+              <a:rPr lang="en-US" sz="1300" dirty="0">
+                <a:solidFill>
+                  <a:srgbClr val="667085"/>
                 </a:solidFill>
                 <a:latin typeface="IBM Plex Sans" pitchFamily="34" charset="0"/>
                 <a:ea typeface="IBM Plex Sans" pitchFamily="34" charset="-122"/>
                 <a:cs typeface="IBM Plex Sans" pitchFamily="34" charset="-120"/>
               </a:rPr>
-              <a:t> and stops with an error. Explain why it fails, and write the line corrected.</a:t>
-            </a:r>
-            <a:endParaRPr lang="en-US" sz="1700" dirty="0"/>
-          </a:p>
-        </p:txBody>
-      </p:sp>
-      <p:sp>
-        <p:nvSpPr>
-          <p:cNvPr id="9" name="Shape 7"/>
+              <a:t>len() counts every character, so a space, a comma and a full stop each add one to the length.</a:t>
+            </a:r>
+            <a:endParaRPr lang="en-US" sz="1300" dirty="0"/>
+          </a:p>
+        </p:txBody>
+      </p:sp>
+      <p:sp>
+        <p:nvSpPr>
+          <p:cNvPr id="10" name="Shape 8"/>
           <p:cNvSpPr/>
           <p:nvPr/>
         </p:nvSpPr>
         <p:spPr>
           <a:xfrm>
-            <a:off x="10515600" y="2130552"/>
-            <a:ext cx="868680" cy="493776"/>
+            <a:off x="6217920" y="1828800"/>
+            <a:ext cx="5394960" cy="1737360"/>
           </a:xfrm>
           <a:prstGeom prst="roundRect">
             <a:avLst>
-              <a:gd name="adj" fmla="val 18519"/>
-            </a:avLst>
-          </a:prstGeom>
-          <a:solidFill>
-            <a:srgbClr val="EEF2FB"/>
-          </a:solidFill>
-          <a:ln/>
-        </p:spPr>
-      </p:sp>
-      <p:sp>
-        <p:nvSpPr>
-          <p:cNvPr id="10" name="Text 8"/>
-          <p:cNvSpPr txBox="1"/>
-          <p:nvPr/>
-        </p:nvSpPr>
-        <p:spPr>
-          <a:xfrm>
-            <a:off x="10515600" y="2130552"/>
-            <a:ext cx="868680" cy="493776"/>
-          </a:xfrm>
-          <a:prstGeom prst="rect">
-            <a:avLst/>
-          </a:prstGeom>
-          <a:noFill/>
-          <a:ln/>
-        </p:spPr>
-        <p:txBody>
-          <a:bodyPr wrap="square" lIns="0" tIns="0" rIns="0" bIns="0" rtlCol="0" anchor="ctr"/>
-          <a:lstStyle/>
-          <a:p>
-            <a:pPr algn="ctr" indent="0" marL="0">
-              <a:buNone/>
-            </a:pPr>
-            <a:r>
-              <a:rPr lang="en-US" sz="1500" b="1" dirty="0">
-                <a:solidFill>
-                  <a:srgbClr val="2D63FF"/>
-                </a:solidFill>
-                <a:latin typeface="IBM Plex Mono" pitchFamily="34" charset="0"/>
-                <a:ea typeface="IBM Plex Mono" pitchFamily="34" charset="-122"/>
-                <a:cs typeface="IBM Plex Mono" pitchFamily="34" charset="-120"/>
-              </a:rPr>
-              <a:t>[3]</a:t>
-            </a:r>
-            <a:endParaRPr lang="en-US" sz="1500" dirty="0"/>
-          </a:p>
-        </p:txBody>
-      </p:sp>
-      <p:sp>
-        <p:nvSpPr>
-          <p:cNvPr id="11" name="Shape 9"/>
-          <p:cNvSpPr/>
-          <p:nvPr/>
-        </p:nvSpPr>
-        <p:spPr>
-          <a:xfrm>
-            <a:off x="502920" y="3127248"/>
-            <a:ext cx="11155680" cy="1097280"/>
-          </a:xfrm>
-          <a:prstGeom prst="roundRect">
-            <a:avLst>
-              <a:gd name="adj" fmla="val 10000"/>
+              <a:gd name="adj" fmla="val 6316"/>
             </a:avLst>
           </a:prstGeom>
           <a:solidFill>
@@ -4335,7 +4413,7 @@
           </a:solidFill>
           <a:ln w="15875">
             <a:solidFill>
-              <a:srgbClr val="D9DEE7"/>
+              <a:srgbClr val="08A6A6"/>
             </a:solidFill>
             <a:prstDash val="solid"/>
           </a:ln>
@@ -4343,14 +4421,14 @@
       </p:sp>
       <p:sp>
         <p:nvSpPr>
-          <p:cNvPr id="12" name="Text 10"/>
-          <p:cNvSpPr txBox="1"/>
-          <p:nvPr/>
-        </p:nvSpPr>
-        <p:spPr>
-          <a:xfrm>
-            <a:off x="914400" y="3236976"/>
-            <a:ext cx="9418320" cy="877824"/>
+          <p:cNvPr id="11" name="Text 9"/>
+          <p:cNvSpPr txBox="1"/>
+          <p:nvPr/>
+        </p:nvSpPr>
+        <p:spPr>
+          <a:xfrm>
+            <a:off x="6537960" y="2011680"/>
+            <a:ext cx="4754880" cy="365760"/>
           </a:xfrm>
           <a:prstGeom prst="rect">
             <a:avLst/>
@@ -4363,23 +4441,62 @@
           <a:lstStyle/>
           <a:p>
             <a:pPr indent="0" marL="0">
-              <a:lnSpc>
-                <a:spcPct val="118000"/>
-              </a:lnSpc>
-              <a:buNone/>
-            </a:pPr>
-            <a:r>
-              <a:rPr lang="en-US" sz="1700" dirty="0">
-                <a:solidFill>
-                  <a:srgbClr val="101828"/>
+              <a:buNone/>
+            </a:pPr>
+            <a:r>
+              <a:rPr lang="en-US" sz="1600" b="1" dirty="0">
+                <a:solidFill>
+                  <a:srgbClr val="08A6A6"/>
                 </a:solidFill>
                 <a:latin typeface="IBM Plex Sans" pitchFamily="34" charset="0"/>
                 <a:ea typeface="IBM Plex Sans" pitchFamily="34" charset="-122"/>
                 <a:cs typeface="IBM Plex Sans" pitchFamily="34" charset="-120"/>
               </a:rPr>
-              <a:t>Write a program that reads a line of text and prints how many of its characters are capital letters.</a:t>
-            </a:r>
-            <a:endParaRPr lang="en-US" sz="1700" dirty="0"/>
+              <a:t>Open ends</a:t>
+            </a:r>
+            <a:endParaRPr lang="en-US" sz="1600" dirty="0"/>
+          </a:p>
+        </p:txBody>
+      </p:sp>
+      <p:sp>
+        <p:nvSpPr>
+          <p:cNvPr id="12" name="Text 10"/>
+          <p:cNvSpPr txBox="1"/>
+          <p:nvPr/>
+        </p:nvSpPr>
+        <p:spPr>
+          <a:xfrm>
+            <a:off x="6537960" y="2395728"/>
+            <a:ext cx="4754880" cy="1005840"/>
+          </a:xfrm>
+          <a:prstGeom prst="rect">
+            <a:avLst/>
+          </a:prstGeom>
+          <a:noFill/>
+          <a:ln/>
+        </p:spPr>
+        <p:txBody>
+          <a:bodyPr wrap="square" lIns="0" tIns="0" rIns="0" bIns="0" rtlCol="0" anchor="t"/>
+          <a:lstStyle/>
+          <a:p>
+            <a:pPr indent="0" marL="0">
+              <a:lnSpc>
+                <a:spcPct val="120000"/>
+              </a:lnSpc>
+              <a:buNone/>
+            </a:pPr>
+            <a:r>
+              <a:rPr lang="en-US" sz="1300" dirty="0">
+                <a:solidFill>
+                  <a:srgbClr val="667085"/>
+                </a:solidFill>
+                <a:latin typeface="IBM Plex Sans" pitchFamily="34" charset="0"/>
+                <a:ea typeface="IBM Plex Sans" pitchFamily="34" charset="-122"/>
+                <a:cs typeface="IBM Plex Sans" pitchFamily="34" charset="-120"/>
+              </a:rPr>
+              <a:t>A slice can leave a number out: word[:3] starts at the beginning and word[3:] runs to the end.</a:t>
+            </a:r>
+            <a:endParaRPr lang="en-US" sz="1300" dirty="0"/>
           </a:p>
         </p:txBody>
       </p:sp>
@@ -4391,73 +4508,12 @@
         </p:nvSpPr>
         <p:spPr>
           <a:xfrm>
-            <a:off x="10515600" y="3429000"/>
-            <a:ext cx="868680" cy="493776"/>
+            <a:off x="502920" y="3794760"/>
+            <a:ext cx="5394960" cy="1737360"/>
           </a:xfrm>
           <a:prstGeom prst="roundRect">
             <a:avLst>
-              <a:gd name="adj" fmla="val 18519"/>
-            </a:avLst>
-          </a:prstGeom>
-          <a:solidFill>
-            <a:srgbClr val="EEF2FB"/>
-          </a:solidFill>
-          <a:ln/>
-        </p:spPr>
-      </p:sp>
-      <p:sp>
-        <p:nvSpPr>
-          <p:cNvPr id="14" name="Text 12"/>
-          <p:cNvSpPr txBox="1"/>
-          <p:nvPr/>
-        </p:nvSpPr>
-        <p:spPr>
-          <a:xfrm>
-            <a:off x="10515600" y="3429000"/>
-            <a:ext cx="868680" cy="493776"/>
-          </a:xfrm>
-          <a:prstGeom prst="rect">
-            <a:avLst/>
-          </a:prstGeom>
-          <a:noFill/>
-          <a:ln/>
-        </p:spPr>
-        <p:txBody>
-          <a:bodyPr wrap="square" lIns="0" tIns="0" rIns="0" bIns="0" rtlCol="0" anchor="ctr"/>
-          <a:lstStyle/>
-          <a:p>
-            <a:pPr algn="ctr" indent="0" marL="0">
-              <a:buNone/>
-            </a:pPr>
-            <a:r>
-              <a:rPr lang="en-US" sz="1500" b="1" dirty="0">
-                <a:solidFill>
-                  <a:srgbClr val="2D63FF"/>
-                </a:solidFill>
-                <a:latin typeface="IBM Plex Mono" pitchFamily="34" charset="0"/>
-                <a:ea typeface="IBM Plex Mono" pitchFamily="34" charset="-122"/>
-                <a:cs typeface="IBM Plex Mono" pitchFamily="34" charset="-120"/>
-              </a:rPr>
-              <a:t>[4]</a:t>
-            </a:r>
-            <a:endParaRPr lang="en-US" sz="1500" dirty="0"/>
-          </a:p>
-        </p:txBody>
-      </p:sp>
-      <p:sp>
-        <p:nvSpPr>
-          <p:cNvPr id="15" name="Shape 13"/>
-          <p:cNvSpPr/>
-          <p:nvPr/>
-        </p:nvSpPr>
-        <p:spPr>
-          <a:xfrm>
-            <a:off x="502920" y="4425696"/>
-            <a:ext cx="11155680" cy="1097280"/>
-          </a:xfrm>
-          <a:prstGeom prst="roundRect">
-            <a:avLst>
-              <a:gd name="adj" fmla="val 10000"/>
+              <a:gd name="adj" fmla="val 6316"/>
             </a:avLst>
           </a:prstGeom>
           <a:solidFill>
@@ -4465,7 +4521,7 @@
           </a:solidFill>
           <a:ln w="15875">
             <a:solidFill>
-              <a:srgbClr val="D9DEE7"/>
+              <a:srgbClr val="2D63FF"/>
             </a:solidFill>
             <a:prstDash val="solid"/>
           </a:ln>
@@ -4473,14 +4529,14 @@
       </p:sp>
       <p:sp>
         <p:nvSpPr>
-          <p:cNvPr id="16" name="Text 14"/>
-          <p:cNvSpPr txBox="1"/>
-          <p:nvPr/>
-        </p:nvSpPr>
-        <p:spPr>
-          <a:xfrm>
-            <a:off x="914400" y="4535424"/>
-            <a:ext cx="9418320" cy="877824"/>
+          <p:cNvPr id="14" name="Text 12"/>
+          <p:cNvSpPr txBox="1"/>
+          <p:nvPr/>
+        </p:nvSpPr>
+        <p:spPr>
+          <a:xfrm>
+            <a:off x="822960" y="3977640"/>
+            <a:ext cx="4754880" cy="365760"/>
           </a:xfrm>
           <a:prstGeom prst="rect">
             <a:avLst/>
@@ -4493,47 +4549,130 @@
           <a:lstStyle/>
           <a:p>
             <a:pPr indent="0" marL="0">
-              <a:lnSpc>
-                <a:spcPct val="118000"/>
-              </a:lnSpc>
-              <a:buNone/>
-            </a:pPr>
-            <a:r>
-              <a:rPr lang="en-US" sz="1700" dirty="0">
-                <a:solidFill>
-                  <a:srgbClr val="101828"/>
+              <a:buNone/>
+            </a:pPr>
+            <a:r>
+              <a:rPr lang="en-US" sz="1600" b="1" dirty="0">
+                <a:solidFill>
+                  <a:srgbClr val="2D63FF"/>
                 </a:solidFill>
                 <a:latin typeface="IBM Plex Sans" pitchFamily="34" charset="0"/>
                 <a:ea typeface="IBM Plex Sans" pitchFamily="34" charset="-122"/>
                 <a:cs typeface="IBM Plex Sans" pitchFamily="34" charset="-120"/>
               </a:rPr>
-              <a:t>Write a program that reads a word and prints palindrome when it reads the same both ways once capitals are ignored, and not a palindrome when it does not.</a:t>
-            </a:r>
-            <a:endParaRPr lang="en-US" sz="1700" dirty="0"/>
-          </a:p>
-        </p:txBody>
-      </p:sp>
-      <p:sp>
-        <p:nvSpPr>
-          <p:cNvPr id="17" name="Shape 15"/>
+              <a:t>Nothing is changed</a:t>
+            </a:r>
+            <a:endParaRPr lang="en-US" sz="1600" dirty="0"/>
+          </a:p>
+        </p:txBody>
+      </p:sp>
+      <p:sp>
+        <p:nvSpPr>
+          <p:cNvPr id="15" name="Text 13"/>
+          <p:cNvSpPr txBox="1"/>
+          <p:nvPr/>
+        </p:nvSpPr>
+        <p:spPr>
+          <a:xfrm>
+            <a:off x="822960" y="4361688"/>
+            <a:ext cx="4754880" cy="1005840"/>
+          </a:xfrm>
+          <a:prstGeom prst="rect">
+            <a:avLst/>
+          </a:prstGeom>
+          <a:noFill/>
+          <a:ln/>
+        </p:spPr>
+        <p:txBody>
+          <a:bodyPr wrap="square" lIns="0" tIns="0" rIns="0" bIns="0" rtlCol="0" anchor="t"/>
+          <a:lstStyle/>
+          <a:p>
+            <a:pPr indent="0" marL="0">
+              <a:lnSpc>
+                <a:spcPct val="120000"/>
+              </a:lnSpc>
+              <a:buNone/>
+            </a:pPr>
+            <a:r>
+              <a:rPr lang="en-US" sz="1300" dirty="0">
+                <a:solidFill>
+                  <a:srgbClr val="667085"/>
+                </a:solidFill>
+                <a:latin typeface="IBM Plex Sans" pitchFamily="34" charset="0"/>
+                <a:ea typeface="IBM Plex Sans" pitchFamily="34" charset="-122"/>
+                <a:cs typeface="IBM Plex Sans" pitchFamily="34" charset="-120"/>
+              </a:rPr>
+              <a:t>upper() does not change the original - it hands back a new string. Strings in Python cannot be edited in place.</a:t>
+            </a:r>
+            <a:endParaRPr lang="en-US" sz="1300" dirty="0"/>
+          </a:p>
+        </p:txBody>
+      </p:sp>
+      <p:sp>
+        <p:nvSpPr>
+          <p:cNvPr id="16" name="Shape 14"/>
           <p:cNvSpPr/>
           <p:nvPr/>
         </p:nvSpPr>
         <p:spPr>
           <a:xfrm>
-            <a:off x="10515600" y="4727448"/>
-            <a:ext cx="868680" cy="493776"/>
+            <a:off x="6217920" y="3794760"/>
+            <a:ext cx="5394960" cy="1737360"/>
           </a:xfrm>
           <a:prstGeom prst="roundRect">
             <a:avLst>
-              <a:gd name="adj" fmla="val 18519"/>
+              <a:gd name="adj" fmla="val 6316"/>
             </a:avLst>
           </a:prstGeom>
           <a:solidFill>
-            <a:srgbClr val="EEF2FB"/>
+            <a:srgbClr val="FFFFFF"/>
           </a:solidFill>
-          <a:ln/>
-        </p:spPr>
+          <a:ln w="15875">
+            <a:solidFill>
+              <a:srgbClr val="08A6A6"/>
+            </a:solidFill>
+            <a:prstDash val="solid"/>
+          </a:ln>
+        </p:spPr>
+      </p:sp>
+      <p:sp>
+        <p:nvSpPr>
+          <p:cNvPr id="17" name="Text 15"/>
+          <p:cNvSpPr txBox="1"/>
+          <p:nvPr/>
+        </p:nvSpPr>
+        <p:spPr>
+          <a:xfrm>
+            <a:off x="6537960" y="3977640"/>
+            <a:ext cx="4754880" cy="365760"/>
+          </a:xfrm>
+          <a:prstGeom prst="rect">
+            <a:avLst/>
+          </a:prstGeom>
+          <a:noFill/>
+          <a:ln/>
+        </p:spPr>
+        <p:txBody>
+          <a:bodyPr wrap="square" lIns="0" tIns="0" rIns="0" bIns="0" rtlCol="0" anchor="ctr"/>
+          <a:lstStyle/>
+          <a:p>
+            <a:pPr indent="0" marL="0">
+              <a:buNone/>
+            </a:pPr>
+            <a:r>
+              <a:rPr lang="en-US" sz="1600" b="1" dirty="0">
+                <a:solidFill>
+                  <a:srgbClr val="08A6A6"/>
+                </a:solidFill>
+                <a:latin typeface="IBM Plex Sans" pitchFamily="34" charset="0"/>
+                <a:ea typeface="IBM Plex Sans" pitchFamily="34" charset="-122"/>
+                <a:cs typeface="IBM Plex Sans" pitchFamily="34" charset="-120"/>
+              </a:rPr>
+              <a:t>Searching fairly</a:t>
+            </a:r>
+            <a:endParaRPr lang="en-US" sz="1600" dirty="0"/>
+          </a:p>
+        </p:txBody>
       </p:sp>
       <p:sp>
         <p:nvSpPr>
@@ -4543,34 +4682,37 @@
         </p:nvSpPr>
         <p:spPr>
           <a:xfrm>
-            <a:off x="10515600" y="4727448"/>
-            <a:ext cx="868680" cy="493776"/>
-          </a:xfrm>
-          <a:prstGeom prst="rect">
-            <a:avLst/>
-          </a:prstGeom>
-          <a:noFill/>
-          <a:ln/>
-        </p:spPr>
-        <p:txBody>
-          <a:bodyPr wrap="square" lIns="0" tIns="0" rIns="0" bIns="0" rtlCol="0" anchor="ctr"/>
-          <a:lstStyle/>
-          <a:p>
-            <a:pPr algn="ctr" indent="0" marL="0">
-              <a:buNone/>
-            </a:pPr>
-            <a:r>
-              <a:rPr lang="en-US" sz="1500" b="1" dirty="0">
-                <a:solidFill>
-                  <a:srgbClr val="2D63FF"/>
-                </a:solidFill>
-                <a:latin typeface="IBM Plex Mono" pitchFamily="34" charset="0"/>
-                <a:ea typeface="IBM Plex Mono" pitchFamily="34" charset="-122"/>
-                <a:cs typeface="IBM Plex Mono" pitchFamily="34" charset="-120"/>
-              </a:rPr>
-              <a:t>[5]</a:t>
-            </a:r>
-            <a:endParaRPr lang="en-US" sz="1500" dirty="0"/>
+            <a:off x="6537960" y="4361688"/>
+            <a:ext cx="4754880" cy="1005840"/>
+          </a:xfrm>
+          <a:prstGeom prst="rect">
+            <a:avLst/>
+          </a:prstGeom>
+          <a:noFill/>
+          <a:ln/>
+        </p:spPr>
+        <p:txBody>
+          <a:bodyPr wrap="square" lIns="0" tIns="0" rIns="0" bIns="0" rtlCol="0" anchor="t"/>
+          <a:lstStyle/>
+          <a:p>
+            <a:pPr indent="0" marL="0">
+              <a:lnSpc>
+                <a:spcPct val="120000"/>
+              </a:lnSpc>
+              <a:buNone/>
+            </a:pPr>
+            <a:r>
+              <a:rPr lang="en-US" sz="1300" dirty="0">
+                <a:solidFill>
+                  <a:srgbClr val="667085"/>
+                </a:solidFill>
+                <a:latin typeface="IBM Plex Sans" pitchFamily="34" charset="0"/>
+                <a:ea typeface="IBM Plex Sans" pitchFamily="34" charset="-122"/>
+                <a:cs typeface="IBM Plex Sans" pitchFamily="34" charset="-120"/>
+              </a:rPr>
+              <a:t>To search without caring about capitals, lower() both the text and the thing you are looking for before you search.</a:t>
+            </a:r>
+            <a:endParaRPr lang="en-US" sz="1300" dirty="0"/>
           </a:p>
         </p:txBody>
       </p:sp>
@@ -4585,6 +4727,791 @@
 <file path=ppt/slides/slide14.xml><?xml version="1.0" encoding="utf-8"?>
 <p:sld xmlns:a="http://schemas.openxmlformats.org/drawingml/2006/main" xmlns:r="http://schemas.openxmlformats.org/officeDocument/2006/relationships" xmlns:p="http://schemas.openxmlformats.org/presentationml/2006/main">
   <p:cSld name="Slide 14">
+    <p:bg>
+      <p:bgPr>
+        <a:solidFill>
+          <a:srgbClr val="F7F7F4"/>
+        </a:solidFill>
+      </p:bgPr>
+    </p:bg>
+    <p:spTree>
+      <p:nvGrpSpPr>
+        <p:cNvPr id="1" name=""/>
+        <p:cNvGrpSpPr/>
+        <p:nvPr/>
+      </p:nvGrpSpPr>
+      <p:grpSpPr>
+        <a:xfrm>
+          <a:off x="0" y="0"/>
+          <a:ext cx="0" cy="0"/>
+          <a:chOff x="0" y="0"/>
+          <a:chExt cx="0" cy="0"/>
+        </a:xfrm>
+      </p:grpSpPr>
+      <p:sp>
+        <p:nvSpPr>
+          <p:cNvPr id="2" name="Shape 0"/>
+          <p:cNvSpPr/>
+          <p:nvPr/>
+        </p:nvSpPr>
+        <p:spPr>
+          <a:xfrm>
+            <a:off x="0" y="0"/>
+            <a:ext cx="12188952" cy="82296"/>
+          </a:xfrm>
+          <a:prstGeom prst="rect">
+            <a:avLst/>
+          </a:prstGeom>
+          <a:solidFill>
+            <a:srgbClr val="2D63FF"/>
+          </a:solidFill>
+          <a:ln/>
+        </p:spPr>
+      </p:sp>
+      <p:sp>
+        <p:nvSpPr>
+          <p:cNvPr id="3" name="Text 1"/>
+          <p:cNvSpPr txBox="1"/>
+          <p:nvPr/>
+        </p:nvSpPr>
+        <p:spPr>
+          <a:xfrm>
+            <a:off x="502920" y="6236208"/>
+            <a:ext cx="7772400" cy="365760"/>
+          </a:xfrm>
+          <a:prstGeom prst="rect">
+            <a:avLst/>
+          </a:prstGeom>
+          <a:noFill/>
+          <a:ln/>
+        </p:spPr>
+        <p:txBody>
+          <a:bodyPr wrap="square" lIns="0" tIns="0" rIns="0" bIns="0" rtlCol="0" anchor="ctr"/>
+          <a:lstStyle/>
+          <a:p>
+            <a:pPr indent="0" marL="0">
+              <a:buNone/>
+            </a:pPr>
+            <a:r>
+              <a:rPr lang="en-US" sz="1100" dirty="0">
+                <a:solidFill>
+                  <a:srgbClr val="667085"/>
+                </a:solidFill>
+                <a:latin typeface="IBM Plex Mono" pitchFamily="34" charset="0"/>
+                <a:ea typeface="IBM Plex Mono" pitchFamily="34" charset="-122"/>
+                <a:cs typeface="IBM Plex Mono" pitchFamily="34" charset="-120"/>
+              </a:rPr>
+              <a:t>Python programming  |  Lesson 6</a:t>
+            </a:r>
+            <a:endParaRPr lang="en-US" sz="1100" dirty="0"/>
+          </a:p>
+        </p:txBody>
+      </p:sp>
+      <p:sp>
+        <p:nvSpPr>
+          <p:cNvPr id="4" name="Text 2"/>
+          <p:cNvSpPr txBox="1"/>
+          <p:nvPr/>
+        </p:nvSpPr>
+        <p:spPr>
+          <a:xfrm>
+            <a:off x="9326880" y="6236208"/>
+            <a:ext cx="2377440" cy="365760"/>
+          </a:xfrm>
+          <a:prstGeom prst="rect">
+            <a:avLst/>
+          </a:prstGeom>
+          <a:noFill/>
+          <a:ln/>
+        </p:spPr>
+        <p:txBody>
+          <a:bodyPr wrap="square" lIns="0" tIns="0" rIns="0" bIns="0" rtlCol="0" anchor="ctr"/>
+          <a:lstStyle/>
+          <a:p>
+            <a:pPr algn="r" indent="0" marL="0">
+              <a:buNone/>
+            </a:pPr>
+            <a:r>
+              <a:rPr lang="en-US" sz="1100" dirty="0">
+                <a:solidFill>
+                  <a:srgbClr val="667085"/>
+                </a:solidFill>
+                <a:latin typeface="IBM Plex Mono" pitchFamily="34" charset="0"/>
+                <a:ea typeface="IBM Plex Mono" pitchFamily="34" charset="-122"/>
+                <a:cs typeface="IBM Plex Mono" pitchFamily="34" charset="-120"/>
+              </a:rPr>
+              <a:t>Revise 360</a:t>
+            </a:r>
+            <a:endParaRPr lang="en-US" sz="1100" dirty="0"/>
+          </a:p>
+        </p:txBody>
+      </p:sp>
+      <p:sp>
+        <p:nvSpPr>
+          <p:cNvPr id="5" name="Text 3"/>
+          <p:cNvSpPr txBox="1"/>
+          <p:nvPr/>
+        </p:nvSpPr>
+        <p:spPr>
+          <a:xfrm>
+            <a:off x="502920" y="411480"/>
+            <a:ext cx="11155680" cy="777240"/>
+          </a:xfrm>
+          <a:prstGeom prst="rect">
+            <a:avLst/>
+          </a:prstGeom>
+          <a:noFill/>
+          <a:ln/>
+        </p:spPr>
+        <p:txBody>
+          <a:bodyPr wrap="square" lIns="0" tIns="0" rIns="0" bIns="0" rtlCol="0" anchor="ctr"/>
+          <a:lstStyle/>
+          <a:p>
+            <a:pPr indent="0" marL="0">
+              <a:buNone/>
+            </a:pPr>
+            <a:r>
+              <a:rPr lang="en-US" sz="3200" b="1" dirty="0">
+                <a:solidFill>
+                  <a:srgbClr val="101828"/>
+                </a:solidFill>
+                <a:latin typeface="IBM Plex Sans" pitchFamily="34" charset="0"/>
+                <a:ea typeface="IBM Plex Sans" pitchFamily="34" charset="-122"/>
+                <a:cs typeface="IBM Plex Sans" pitchFamily="34" charset="-120"/>
+              </a:rPr>
+              <a:t>Exam practice</a:t>
+            </a:r>
+            <a:endParaRPr lang="en-US" sz="3200" dirty="0"/>
+          </a:p>
+        </p:txBody>
+      </p:sp>
+      <p:sp>
+        <p:nvSpPr>
+          <p:cNvPr id="6" name="Text 4"/>
+          <p:cNvSpPr txBox="1"/>
+          <p:nvPr/>
+        </p:nvSpPr>
+        <p:spPr>
+          <a:xfrm>
+            <a:off x="502920" y="1170432"/>
+            <a:ext cx="11155680" cy="411480"/>
+          </a:xfrm>
+          <a:prstGeom prst="rect">
+            <a:avLst/>
+          </a:prstGeom>
+          <a:noFill/>
+          <a:ln/>
+        </p:spPr>
+        <p:txBody>
+          <a:bodyPr wrap="square" lIns="0" tIns="0" rIns="0" bIns="0" rtlCol="0" anchor="ctr"/>
+          <a:lstStyle/>
+          <a:p>
+            <a:pPr indent="0" marL="0">
+              <a:buNone/>
+            </a:pPr>
+            <a:r>
+              <a:rPr lang="en-US" sz="1500" dirty="0">
+                <a:solidFill>
+                  <a:srgbClr val="667085"/>
+                </a:solidFill>
+                <a:latin typeface="IBM Plex Sans" pitchFamily="34" charset="0"/>
+                <a:ea typeface="IBM Plex Sans" pitchFamily="34" charset="-122"/>
+                <a:cs typeface="IBM Plex Sans" pitchFamily="34" charset="-120"/>
+              </a:rPr>
+              <a:t>Devices away. Answer from memory on the worksheet.</a:t>
+            </a:r>
+            <a:endParaRPr lang="en-US" sz="1500" dirty="0"/>
+          </a:p>
+        </p:txBody>
+      </p:sp>
+      <p:sp>
+        <p:nvSpPr>
+          <p:cNvPr id="7" name="Shape 5"/>
+          <p:cNvSpPr/>
+          <p:nvPr/>
+        </p:nvSpPr>
+        <p:spPr>
+          <a:xfrm>
+            <a:off x="502920" y="1828800"/>
+            <a:ext cx="11155680" cy="1097280"/>
+          </a:xfrm>
+          <a:prstGeom prst="roundRect">
+            <a:avLst>
+              <a:gd name="adj" fmla="val 10000"/>
+            </a:avLst>
+          </a:prstGeom>
+          <a:solidFill>
+            <a:srgbClr val="FFFFFF"/>
+          </a:solidFill>
+          <a:ln w="15875">
+            <a:solidFill>
+              <a:srgbClr val="D9DEE7"/>
+            </a:solidFill>
+            <a:prstDash val="solid"/>
+          </a:ln>
+        </p:spPr>
+      </p:sp>
+      <p:sp>
+        <p:nvSpPr>
+          <p:cNvPr id="8" name="Text 6"/>
+          <p:cNvSpPr txBox="1"/>
+          <p:nvPr/>
+        </p:nvSpPr>
+        <p:spPr>
+          <a:xfrm>
+            <a:off x="914400" y="1938528"/>
+            <a:ext cx="9418320" cy="877824"/>
+          </a:xfrm>
+          <a:prstGeom prst="rect">
+            <a:avLst/>
+          </a:prstGeom>
+          <a:noFill/>
+          <a:ln/>
+        </p:spPr>
+        <p:txBody>
+          <a:bodyPr wrap="square" lIns="0" tIns="0" rIns="0" bIns="0" rtlCol="0" anchor="ctr"/>
+          <a:lstStyle/>
+          <a:p>
+            <a:pPr indent="0" marL="0">
+              <a:lnSpc>
+                <a:spcPct val="118000"/>
+              </a:lnSpc>
+              <a:buNone/>
+            </a:pPr>
+            <a:r>
+              <a:rPr lang="en-US" sz="1700" dirty="0">
+                <a:solidFill>
+                  <a:srgbClr val="101828"/>
+                </a:solidFill>
+                <a:latin typeface="IBM Plex Sans" pitchFamily="34" charset="0"/>
+                <a:ea typeface="IBM Plex Sans" pitchFamily="34" charset="-122"/>
+                <a:cs typeface="IBM Plex Sans" pitchFamily="34" charset="-120"/>
+              </a:rPr>
+              <a:t>A program tries to print the last character of a word with </a:t>
+            </a:r>
+            <a:pPr indent="0" marL="0">
+              <a:lnSpc>
+                <a:spcPct val="118000"/>
+              </a:lnSpc>
+              <a:buNone/>
+            </a:pPr>
+            <a:r>
+              <a:rPr lang="en-US" sz="1700" dirty="0">
+                <a:solidFill>
+                  <a:srgbClr val="1D4ED8"/>
+                </a:solidFill>
+                <a:latin typeface="IBM Plex Mono" pitchFamily="34" charset="0"/>
+                <a:ea typeface="IBM Plex Mono" pitchFamily="34" charset="-122"/>
+                <a:cs typeface="IBM Plex Mono" pitchFamily="34" charset="-120"/>
+              </a:rPr>
+              <a:t>print</a:t>
+            </a:r>
+            <a:pPr indent="0" marL="0">
+              <a:lnSpc>
+                <a:spcPct val="118000"/>
+              </a:lnSpc>
+              <a:buNone/>
+            </a:pPr>
+            <a:r>
+              <a:rPr lang="en-US" sz="1700" dirty="0">
+                <a:solidFill>
+                  <a:srgbClr val="3F3F46"/>
+                </a:solidFill>
+                <a:latin typeface="IBM Plex Mono" pitchFamily="34" charset="0"/>
+                <a:ea typeface="IBM Plex Mono" pitchFamily="34" charset="-122"/>
+                <a:cs typeface="IBM Plex Mono" pitchFamily="34" charset="-120"/>
+              </a:rPr>
+              <a:t>(</a:t>
+            </a:r>
+            <a:pPr indent="0" marL="0">
+              <a:lnSpc>
+                <a:spcPct val="118000"/>
+              </a:lnSpc>
+              <a:buNone/>
+            </a:pPr>
+            <a:r>
+              <a:rPr lang="en-US" sz="1700" dirty="0">
+                <a:solidFill>
+                  <a:srgbClr val="18181B"/>
+                </a:solidFill>
+                <a:latin typeface="IBM Plex Mono" pitchFamily="34" charset="0"/>
+                <a:ea typeface="IBM Plex Mono" pitchFamily="34" charset="-122"/>
+                <a:cs typeface="IBM Plex Mono" pitchFamily="34" charset="-120"/>
+              </a:rPr>
+              <a:t>word</a:t>
+            </a:r>
+            <a:pPr indent="0" marL="0">
+              <a:lnSpc>
+                <a:spcPct val="118000"/>
+              </a:lnSpc>
+              <a:buNone/>
+            </a:pPr>
+            <a:r>
+              <a:rPr lang="en-US" sz="1700" dirty="0">
+                <a:solidFill>
+                  <a:srgbClr val="3F3F46"/>
+                </a:solidFill>
+                <a:latin typeface="IBM Plex Mono" pitchFamily="34" charset="0"/>
+                <a:ea typeface="IBM Plex Mono" pitchFamily="34" charset="-122"/>
+                <a:cs typeface="IBM Plex Mono" pitchFamily="34" charset="-120"/>
+              </a:rPr>
+              <a:t>[</a:t>
+            </a:r>
+            <a:pPr indent="0" marL="0">
+              <a:lnSpc>
+                <a:spcPct val="118000"/>
+              </a:lnSpc>
+              <a:buNone/>
+            </a:pPr>
+            <a:r>
+              <a:rPr lang="en-US" sz="1700" dirty="0">
+                <a:solidFill>
+                  <a:srgbClr val="1D4ED8"/>
+                </a:solidFill>
+                <a:latin typeface="IBM Plex Mono" pitchFamily="34" charset="0"/>
+                <a:ea typeface="IBM Plex Mono" pitchFamily="34" charset="-122"/>
+                <a:cs typeface="IBM Plex Mono" pitchFamily="34" charset="-120"/>
+              </a:rPr>
+              <a:t>len</a:t>
+            </a:r>
+            <a:pPr indent="0" marL="0">
+              <a:lnSpc>
+                <a:spcPct val="118000"/>
+              </a:lnSpc>
+              <a:buNone/>
+            </a:pPr>
+            <a:r>
+              <a:rPr lang="en-US" sz="1700" dirty="0">
+                <a:solidFill>
+                  <a:srgbClr val="3F3F46"/>
+                </a:solidFill>
+                <a:latin typeface="IBM Plex Mono" pitchFamily="34" charset="0"/>
+                <a:ea typeface="IBM Plex Mono" pitchFamily="34" charset="-122"/>
+                <a:cs typeface="IBM Plex Mono" pitchFamily="34" charset="-120"/>
+              </a:rPr>
+              <a:t>(</a:t>
+            </a:r>
+            <a:pPr indent="0" marL="0">
+              <a:lnSpc>
+                <a:spcPct val="118000"/>
+              </a:lnSpc>
+              <a:buNone/>
+            </a:pPr>
+            <a:r>
+              <a:rPr lang="en-US" sz="1700" dirty="0">
+                <a:solidFill>
+                  <a:srgbClr val="18181B"/>
+                </a:solidFill>
+                <a:latin typeface="IBM Plex Mono" pitchFamily="34" charset="0"/>
+                <a:ea typeface="IBM Plex Mono" pitchFamily="34" charset="-122"/>
+                <a:cs typeface="IBM Plex Mono" pitchFamily="34" charset="-120"/>
+              </a:rPr>
+              <a:t>word</a:t>
+            </a:r>
+            <a:pPr indent="0" marL="0">
+              <a:lnSpc>
+                <a:spcPct val="118000"/>
+              </a:lnSpc>
+              <a:buNone/>
+            </a:pPr>
+            <a:r>
+              <a:rPr lang="en-US" sz="1700" dirty="0">
+                <a:solidFill>
+                  <a:srgbClr val="3F3F46"/>
+                </a:solidFill>
+                <a:latin typeface="IBM Plex Mono" pitchFamily="34" charset="0"/>
+                <a:ea typeface="IBM Plex Mono" pitchFamily="34" charset="-122"/>
+                <a:cs typeface="IBM Plex Mono" pitchFamily="34" charset="-120"/>
+              </a:rPr>
+              <a:t>)</a:t>
+            </a:r>
+            <a:pPr indent="0" marL="0">
+              <a:lnSpc>
+                <a:spcPct val="118000"/>
+              </a:lnSpc>
+              <a:buNone/>
+            </a:pPr>
+            <a:r>
+              <a:rPr lang="en-US" sz="1700" dirty="0">
+                <a:solidFill>
+                  <a:srgbClr val="3F3F46"/>
+                </a:solidFill>
+                <a:latin typeface="IBM Plex Mono" pitchFamily="34" charset="0"/>
+                <a:ea typeface="IBM Plex Mono" pitchFamily="34" charset="-122"/>
+                <a:cs typeface="IBM Plex Mono" pitchFamily="34" charset="-120"/>
+              </a:rPr>
+              <a:t>]</a:t>
+            </a:r>
+            <a:pPr indent="0" marL="0">
+              <a:lnSpc>
+                <a:spcPct val="118000"/>
+              </a:lnSpc>
+              <a:buNone/>
+            </a:pPr>
+            <a:r>
+              <a:rPr lang="en-US" sz="1700" dirty="0">
+                <a:solidFill>
+                  <a:srgbClr val="3F3F46"/>
+                </a:solidFill>
+                <a:latin typeface="IBM Plex Mono" pitchFamily="34" charset="0"/>
+                <a:ea typeface="IBM Plex Mono" pitchFamily="34" charset="-122"/>
+                <a:cs typeface="IBM Plex Mono" pitchFamily="34" charset="-120"/>
+              </a:rPr>
+              <a:t>)</a:t>
+            </a:r>
+            <a:pPr indent="0" marL="0">
+              <a:lnSpc>
+                <a:spcPct val="118000"/>
+              </a:lnSpc>
+              <a:buNone/>
+            </a:pPr>
+            <a:r>
+              <a:rPr lang="en-US" sz="1700" dirty="0">
+                <a:solidFill>
+                  <a:srgbClr val="101828"/>
+                </a:solidFill>
+                <a:latin typeface="IBM Plex Sans" pitchFamily="34" charset="0"/>
+                <a:ea typeface="IBM Plex Sans" pitchFamily="34" charset="-122"/>
+                <a:cs typeface="IBM Plex Sans" pitchFamily="34" charset="-120"/>
+              </a:rPr>
+              <a:t> and stops with an error. Explain why it fails, and write the line corrected.</a:t>
+            </a:r>
+            <a:endParaRPr lang="en-US" sz="1700" dirty="0"/>
+          </a:p>
+        </p:txBody>
+      </p:sp>
+      <p:sp>
+        <p:nvSpPr>
+          <p:cNvPr id="9" name="Shape 7"/>
+          <p:cNvSpPr/>
+          <p:nvPr/>
+        </p:nvSpPr>
+        <p:spPr>
+          <a:xfrm>
+            <a:off x="10515600" y="2130552"/>
+            <a:ext cx="868680" cy="493776"/>
+          </a:xfrm>
+          <a:prstGeom prst="roundRect">
+            <a:avLst>
+              <a:gd name="adj" fmla="val 18519"/>
+            </a:avLst>
+          </a:prstGeom>
+          <a:solidFill>
+            <a:srgbClr val="EEF2FB"/>
+          </a:solidFill>
+          <a:ln/>
+        </p:spPr>
+      </p:sp>
+      <p:sp>
+        <p:nvSpPr>
+          <p:cNvPr id="10" name="Text 8"/>
+          <p:cNvSpPr txBox="1"/>
+          <p:nvPr/>
+        </p:nvSpPr>
+        <p:spPr>
+          <a:xfrm>
+            <a:off x="10515600" y="2130552"/>
+            <a:ext cx="868680" cy="493776"/>
+          </a:xfrm>
+          <a:prstGeom prst="rect">
+            <a:avLst/>
+          </a:prstGeom>
+          <a:noFill/>
+          <a:ln/>
+        </p:spPr>
+        <p:txBody>
+          <a:bodyPr wrap="square" lIns="0" tIns="0" rIns="0" bIns="0" rtlCol="0" anchor="ctr"/>
+          <a:lstStyle/>
+          <a:p>
+            <a:pPr algn="ctr" indent="0" marL="0">
+              <a:buNone/>
+            </a:pPr>
+            <a:r>
+              <a:rPr lang="en-US" sz="1500" b="1" dirty="0">
+                <a:solidFill>
+                  <a:srgbClr val="2D63FF"/>
+                </a:solidFill>
+                <a:latin typeface="IBM Plex Mono" pitchFamily="34" charset="0"/>
+                <a:ea typeface="IBM Plex Mono" pitchFamily="34" charset="-122"/>
+                <a:cs typeface="IBM Plex Mono" pitchFamily="34" charset="-120"/>
+              </a:rPr>
+              <a:t>[3]</a:t>
+            </a:r>
+            <a:endParaRPr lang="en-US" sz="1500" dirty="0"/>
+          </a:p>
+        </p:txBody>
+      </p:sp>
+      <p:sp>
+        <p:nvSpPr>
+          <p:cNvPr id="11" name="Shape 9"/>
+          <p:cNvSpPr/>
+          <p:nvPr/>
+        </p:nvSpPr>
+        <p:spPr>
+          <a:xfrm>
+            <a:off x="502920" y="3127248"/>
+            <a:ext cx="11155680" cy="1097280"/>
+          </a:xfrm>
+          <a:prstGeom prst="roundRect">
+            <a:avLst>
+              <a:gd name="adj" fmla="val 10000"/>
+            </a:avLst>
+          </a:prstGeom>
+          <a:solidFill>
+            <a:srgbClr val="FFFFFF"/>
+          </a:solidFill>
+          <a:ln w="15875">
+            <a:solidFill>
+              <a:srgbClr val="D9DEE7"/>
+            </a:solidFill>
+            <a:prstDash val="solid"/>
+          </a:ln>
+        </p:spPr>
+      </p:sp>
+      <p:sp>
+        <p:nvSpPr>
+          <p:cNvPr id="12" name="Text 10"/>
+          <p:cNvSpPr txBox="1"/>
+          <p:nvPr/>
+        </p:nvSpPr>
+        <p:spPr>
+          <a:xfrm>
+            <a:off x="914400" y="3236976"/>
+            <a:ext cx="9418320" cy="877824"/>
+          </a:xfrm>
+          <a:prstGeom prst="rect">
+            <a:avLst/>
+          </a:prstGeom>
+          <a:noFill/>
+          <a:ln/>
+        </p:spPr>
+        <p:txBody>
+          <a:bodyPr wrap="square" lIns="0" tIns="0" rIns="0" bIns="0" rtlCol="0" anchor="ctr"/>
+          <a:lstStyle/>
+          <a:p>
+            <a:pPr indent="0" marL="0">
+              <a:lnSpc>
+                <a:spcPct val="118000"/>
+              </a:lnSpc>
+              <a:buNone/>
+            </a:pPr>
+            <a:r>
+              <a:rPr lang="en-US" sz="1700" dirty="0">
+                <a:solidFill>
+                  <a:srgbClr val="101828"/>
+                </a:solidFill>
+                <a:latin typeface="IBM Plex Sans" pitchFamily="34" charset="0"/>
+                <a:ea typeface="IBM Plex Sans" pitchFamily="34" charset="-122"/>
+                <a:cs typeface="IBM Plex Sans" pitchFamily="34" charset="-120"/>
+              </a:rPr>
+              <a:t>Write a program that reads a line of text and prints how many of its characters are capital letters.</a:t>
+            </a:r>
+            <a:endParaRPr lang="en-US" sz="1700" dirty="0"/>
+          </a:p>
+        </p:txBody>
+      </p:sp>
+      <p:sp>
+        <p:nvSpPr>
+          <p:cNvPr id="13" name="Shape 11"/>
+          <p:cNvSpPr/>
+          <p:nvPr/>
+        </p:nvSpPr>
+        <p:spPr>
+          <a:xfrm>
+            <a:off x="10515600" y="3429000"/>
+            <a:ext cx="868680" cy="493776"/>
+          </a:xfrm>
+          <a:prstGeom prst="roundRect">
+            <a:avLst>
+              <a:gd name="adj" fmla="val 18519"/>
+            </a:avLst>
+          </a:prstGeom>
+          <a:solidFill>
+            <a:srgbClr val="EEF2FB"/>
+          </a:solidFill>
+          <a:ln/>
+        </p:spPr>
+      </p:sp>
+      <p:sp>
+        <p:nvSpPr>
+          <p:cNvPr id="14" name="Text 12"/>
+          <p:cNvSpPr txBox="1"/>
+          <p:nvPr/>
+        </p:nvSpPr>
+        <p:spPr>
+          <a:xfrm>
+            <a:off x="10515600" y="3429000"/>
+            <a:ext cx="868680" cy="493776"/>
+          </a:xfrm>
+          <a:prstGeom prst="rect">
+            <a:avLst/>
+          </a:prstGeom>
+          <a:noFill/>
+          <a:ln/>
+        </p:spPr>
+        <p:txBody>
+          <a:bodyPr wrap="square" lIns="0" tIns="0" rIns="0" bIns="0" rtlCol="0" anchor="ctr"/>
+          <a:lstStyle/>
+          <a:p>
+            <a:pPr algn="ctr" indent="0" marL="0">
+              <a:buNone/>
+            </a:pPr>
+            <a:r>
+              <a:rPr lang="en-US" sz="1500" b="1" dirty="0">
+                <a:solidFill>
+                  <a:srgbClr val="2D63FF"/>
+                </a:solidFill>
+                <a:latin typeface="IBM Plex Mono" pitchFamily="34" charset="0"/>
+                <a:ea typeface="IBM Plex Mono" pitchFamily="34" charset="-122"/>
+                <a:cs typeface="IBM Plex Mono" pitchFamily="34" charset="-120"/>
+              </a:rPr>
+              <a:t>[4]</a:t>
+            </a:r>
+            <a:endParaRPr lang="en-US" sz="1500" dirty="0"/>
+          </a:p>
+        </p:txBody>
+      </p:sp>
+      <p:sp>
+        <p:nvSpPr>
+          <p:cNvPr id="15" name="Shape 13"/>
+          <p:cNvSpPr/>
+          <p:nvPr/>
+        </p:nvSpPr>
+        <p:spPr>
+          <a:xfrm>
+            <a:off x="502920" y="4425696"/>
+            <a:ext cx="11155680" cy="1097280"/>
+          </a:xfrm>
+          <a:prstGeom prst="roundRect">
+            <a:avLst>
+              <a:gd name="adj" fmla="val 10000"/>
+            </a:avLst>
+          </a:prstGeom>
+          <a:solidFill>
+            <a:srgbClr val="FFFFFF"/>
+          </a:solidFill>
+          <a:ln w="15875">
+            <a:solidFill>
+              <a:srgbClr val="D9DEE7"/>
+            </a:solidFill>
+            <a:prstDash val="solid"/>
+          </a:ln>
+        </p:spPr>
+      </p:sp>
+      <p:sp>
+        <p:nvSpPr>
+          <p:cNvPr id="16" name="Text 14"/>
+          <p:cNvSpPr txBox="1"/>
+          <p:nvPr/>
+        </p:nvSpPr>
+        <p:spPr>
+          <a:xfrm>
+            <a:off x="914400" y="4535424"/>
+            <a:ext cx="9418320" cy="877824"/>
+          </a:xfrm>
+          <a:prstGeom prst="rect">
+            <a:avLst/>
+          </a:prstGeom>
+          <a:noFill/>
+          <a:ln/>
+        </p:spPr>
+        <p:txBody>
+          <a:bodyPr wrap="square" lIns="0" tIns="0" rIns="0" bIns="0" rtlCol="0" anchor="ctr"/>
+          <a:lstStyle/>
+          <a:p>
+            <a:pPr indent="0" marL="0">
+              <a:lnSpc>
+                <a:spcPct val="118000"/>
+              </a:lnSpc>
+              <a:buNone/>
+            </a:pPr>
+            <a:r>
+              <a:rPr lang="en-US" sz="1700" dirty="0">
+                <a:solidFill>
+                  <a:srgbClr val="101828"/>
+                </a:solidFill>
+                <a:latin typeface="IBM Plex Sans" pitchFamily="34" charset="0"/>
+                <a:ea typeface="IBM Plex Sans" pitchFamily="34" charset="-122"/>
+                <a:cs typeface="IBM Plex Sans" pitchFamily="34" charset="-120"/>
+              </a:rPr>
+              <a:t>Write a program that reads a word and prints palindrome when it reads the same both ways once capitals are ignored, and not a palindrome when it does not.</a:t>
+            </a:r>
+            <a:endParaRPr lang="en-US" sz="1700" dirty="0"/>
+          </a:p>
+        </p:txBody>
+      </p:sp>
+      <p:sp>
+        <p:nvSpPr>
+          <p:cNvPr id="17" name="Shape 15"/>
+          <p:cNvSpPr/>
+          <p:nvPr/>
+        </p:nvSpPr>
+        <p:spPr>
+          <a:xfrm>
+            <a:off x="10515600" y="4727448"/>
+            <a:ext cx="868680" cy="493776"/>
+          </a:xfrm>
+          <a:prstGeom prst="roundRect">
+            <a:avLst>
+              <a:gd name="adj" fmla="val 18519"/>
+            </a:avLst>
+          </a:prstGeom>
+          <a:solidFill>
+            <a:srgbClr val="EEF2FB"/>
+          </a:solidFill>
+          <a:ln/>
+        </p:spPr>
+      </p:sp>
+      <p:sp>
+        <p:nvSpPr>
+          <p:cNvPr id="18" name="Text 16"/>
+          <p:cNvSpPr txBox="1"/>
+          <p:nvPr/>
+        </p:nvSpPr>
+        <p:spPr>
+          <a:xfrm>
+            <a:off x="10515600" y="4727448"/>
+            <a:ext cx="868680" cy="493776"/>
+          </a:xfrm>
+          <a:prstGeom prst="rect">
+            <a:avLst/>
+          </a:prstGeom>
+          <a:noFill/>
+          <a:ln/>
+        </p:spPr>
+        <p:txBody>
+          <a:bodyPr wrap="square" lIns="0" tIns="0" rIns="0" bIns="0" rtlCol="0" anchor="ctr"/>
+          <a:lstStyle/>
+          <a:p>
+            <a:pPr algn="ctr" indent="0" marL="0">
+              <a:buNone/>
+            </a:pPr>
+            <a:r>
+              <a:rPr lang="en-US" sz="1500" b="1" dirty="0">
+                <a:solidFill>
+                  <a:srgbClr val="2D63FF"/>
+                </a:solidFill>
+                <a:latin typeface="IBM Plex Mono" pitchFamily="34" charset="0"/>
+                <a:ea typeface="IBM Plex Mono" pitchFamily="34" charset="-122"/>
+                <a:cs typeface="IBM Plex Mono" pitchFamily="34" charset="-120"/>
+              </a:rPr>
+              <a:t>[5]</a:t>
+            </a:r>
+            <a:endParaRPr lang="en-US" sz="1500" dirty="0"/>
+          </a:p>
+        </p:txBody>
+      </p:sp>
+    </p:spTree>
+  </p:cSld>
+  <p:clrMapOvr>
+    <a:masterClrMapping/>
+  </p:clrMapOvr>
+</p:sld>
+</file>
+
+<file path=ppt/slides/slide15.xml><?xml version="1.0" encoding="utf-8"?>
+<p:sld xmlns:a="http://schemas.openxmlformats.org/drawingml/2006/main" xmlns:r="http://schemas.openxmlformats.org/officeDocument/2006/relationships" xmlns:p="http://schemas.openxmlformats.org/presentationml/2006/main">
+  <p:cSld name="Slide 15">
     <p:bg>
       <p:bgPr>
         <a:solidFill>
